--- a/BLINK IT.pptx
+++ b/BLINK IT.pptx
@@ -49,7 +49,7 @@
         <a:uFillTx/>
       </a:defRPr>
     </a:defPPr>
-    <a:lvl1pPr marL="0" marR="0" indent="0" algn="ctr" defTabSz="2438338" rtl="0" fontAlgn="auto" latinLnBrk="0" hangingPunct="0">
+    <a:lvl1pPr marL="0" marR="0" indent="0" algn="ctr" defTabSz="2438337" rtl="0" fontAlgn="auto" latinLnBrk="0" hangingPunct="0">
       <a:lnSpc>
         <a:spcPct val="100000"/>
       </a:lnSpc>
@@ -73,13 +73,13 @@
         </a:solidFill>
         <a:effectLst/>
         <a:uFillTx/>
-        <a:latin typeface="+mn-lt"/>
-        <a:ea typeface="+mn-ea"/>
-        <a:cs typeface="+mn-cs"/>
+        <a:latin typeface="+mj-lt"/>
+        <a:ea typeface="+mj-ea"/>
+        <a:cs typeface="+mj-cs"/>
         <a:sym typeface="Helvetica Neue"/>
       </a:defRPr>
     </a:lvl1pPr>
-    <a:lvl2pPr marL="0" marR="0" indent="457200" algn="ctr" defTabSz="2438338" rtl="0" fontAlgn="auto" latinLnBrk="0" hangingPunct="0">
+    <a:lvl2pPr marL="0" marR="0" indent="0" algn="ctr" defTabSz="2438337" rtl="0" fontAlgn="auto" latinLnBrk="0" hangingPunct="0">
       <a:lnSpc>
         <a:spcPct val="100000"/>
       </a:lnSpc>
@@ -103,13 +103,13 @@
         </a:solidFill>
         <a:effectLst/>
         <a:uFillTx/>
-        <a:latin typeface="+mn-lt"/>
-        <a:ea typeface="+mn-ea"/>
-        <a:cs typeface="+mn-cs"/>
+        <a:latin typeface="+mj-lt"/>
+        <a:ea typeface="+mj-ea"/>
+        <a:cs typeface="+mj-cs"/>
         <a:sym typeface="Helvetica Neue"/>
       </a:defRPr>
     </a:lvl2pPr>
-    <a:lvl3pPr marL="0" marR="0" indent="914400" algn="ctr" defTabSz="2438338" rtl="0" fontAlgn="auto" latinLnBrk="0" hangingPunct="0">
+    <a:lvl3pPr marL="0" marR="0" indent="0" algn="ctr" defTabSz="2438337" rtl="0" fontAlgn="auto" latinLnBrk="0" hangingPunct="0">
       <a:lnSpc>
         <a:spcPct val="100000"/>
       </a:lnSpc>
@@ -133,13 +133,13 @@
         </a:solidFill>
         <a:effectLst/>
         <a:uFillTx/>
-        <a:latin typeface="+mn-lt"/>
-        <a:ea typeface="+mn-ea"/>
-        <a:cs typeface="+mn-cs"/>
+        <a:latin typeface="+mj-lt"/>
+        <a:ea typeface="+mj-ea"/>
+        <a:cs typeface="+mj-cs"/>
         <a:sym typeface="Helvetica Neue"/>
       </a:defRPr>
     </a:lvl3pPr>
-    <a:lvl4pPr marL="0" marR="0" indent="1371600" algn="ctr" defTabSz="2438338" rtl="0" fontAlgn="auto" latinLnBrk="0" hangingPunct="0">
+    <a:lvl4pPr marL="0" marR="0" indent="0" algn="ctr" defTabSz="2438337" rtl="0" fontAlgn="auto" latinLnBrk="0" hangingPunct="0">
       <a:lnSpc>
         <a:spcPct val="100000"/>
       </a:lnSpc>
@@ -163,13 +163,13 @@
         </a:solidFill>
         <a:effectLst/>
         <a:uFillTx/>
-        <a:latin typeface="+mn-lt"/>
-        <a:ea typeface="+mn-ea"/>
-        <a:cs typeface="+mn-cs"/>
+        <a:latin typeface="+mj-lt"/>
+        <a:ea typeface="+mj-ea"/>
+        <a:cs typeface="+mj-cs"/>
         <a:sym typeface="Helvetica Neue"/>
       </a:defRPr>
     </a:lvl4pPr>
-    <a:lvl5pPr marL="0" marR="0" indent="1828800" algn="ctr" defTabSz="2438338" rtl="0" fontAlgn="auto" latinLnBrk="0" hangingPunct="0">
+    <a:lvl5pPr marL="0" marR="0" indent="0" algn="ctr" defTabSz="2438337" rtl="0" fontAlgn="auto" latinLnBrk="0" hangingPunct="0">
       <a:lnSpc>
         <a:spcPct val="100000"/>
       </a:lnSpc>
@@ -193,13 +193,13 @@
         </a:solidFill>
         <a:effectLst/>
         <a:uFillTx/>
-        <a:latin typeface="+mn-lt"/>
-        <a:ea typeface="+mn-ea"/>
-        <a:cs typeface="+mn-cs"/>
+        <a:latin typeface="+mj-lt"/>
+        <a:ea typeface="+mj-ea"/>
+        <a:cs typeface="+mj-cs"/>
         <a:sym typeface="Helvetica Neue"/>
       </a:defRPr>
     </a:lvl5pPr>
-    <a:lvl6pPr marL="0" marR="0" indent="2286000" algn="ctr" defTabSz="2438338" rtl="0" fontAlgn="auto" latinLnBrk="0" hangingPunct="0">
+    <a:lvl6pPr marL="0" marR="0" indent="0" algn="ctr" defTabSz="2438337" rtl="0" fontAlgn="auto" latinLnBrk="0" hangingPunct="0">
       <a:lnSpc>
         <a:spcPct val="100000"/>
       </a:lnSpc>
@@ -223,13 +223,13 @@
         </a:solidFill>
         <a:effectLst/>
         <a:uFillTx/>
-        <a:latin typeface="+mn-lt"/>
-        <a:ea typeface="+mn-ea"/>
-        <a:cs typeface="+mn-cs"/>
+        <a:latin typeface="+mj-lt"/>
+        <a:ea typeface="+mj-ea"/>
+        <a:cs typeface="+mj-cs"/>
         <a:sym typeface="Helvetica Neue"/>
       </a:defRPr>
     </a:lvl6pPr>
-    <a:lvl7pPr marL="0" marR="0" indent="2743200" algn="ctr" defTabSz="2438338" rtl="0" fontAlgn="auto" latinLnBrk="0" hangingPunct="0">
+    <a:lvl7pPr marL="0" marR="0" indent="0" algn="ctr" defTabSz="2438337" rtl="0" fontAlgn="auto" latinLnBrk="0" hangingPunct="0">
       <a:lnSpc>
         <a:spcPct val="100000"/>
       </a:lnSpc>
@@ -253,13 +253,13 @@
         </a:solidFill>
         <a:effectLst/>
         <a:uFillTx/>
-        <a:latin typeface="+mn-lt"/>
-        <a:ea typeface="+mn-ea"/>
-        <a:cs typeface="+mn-cs"/>
+        <a:latin typeface="+mj-lt"/>
+        <a:ea typeface="+mj-ea"/>
+        <a:cs typeface="+mj-cs"/>
         <a:sym typeface="Helvetica Neue"/>
       </a:defRPr>
     </a:lvl7pPr>
-    <a:lvl8pPr marL="0" marR="0" indent="3200400" algn="ctr" defTabSz="2438338" rtl="0" fontAlgn="auto" latinLnBrk="0" hangingPunct="0">
+    <a:lvl8pPr marL="0" marR="0" indent="0" algn="ctr" defTabSz="2438337" rtl="0" fontAlgn="auto" latinLnBrk="0" hangingPunct="0">
       <a:lnSpc>
         <a:spcPct val="100000"/>
       </a:lnSpc>
@@ -283,13 +283,13 @@
         </a:solidFill>
         <a:effectLst/>
         <a:uFillTx/>
-        <a:latin typeface="+mn-lt"/>
-        <a:ea typeface="+mn-ea"/>
-        <a:cs typeface="+mn-cs"/>
+        <a:latin typeface="+mj-lt"/>
+        <a:ea typeface="+mj-ea"/>
+        <a:cs typeface="+mj-cs"/>
         <a:sym typeface="Helvetica Neue"/>
       </a:defRPr>
     </a:lvl8pPr>
-    <a:lvl9pPr marL="0" marR="0" indent="3657600" algn="ctr" defTabSz="2438338" rtl="0" fontAlgn="auto" latinLnBrk="0" hangingPunct="0">
+    <a:lvl9pPr marL="0" marR="0" indent="0" algn="ctr" defTabSz="2438337" rtl="0" fontAlgn="auto" latinLnBrk="0" hangingPunct="0">
       <a:lnSpc>
         <a:spcPct val="100000"/>
       </a:lnSpc>
@@ -313,9 +313,9 @@
         </a:solidFill>
         <a:effectLst/>
         <a:uFillTx/>
-        <a:latin typeface="+mn-lt"/>
-        <a:ea typeface="+mn-ea"/>
-        <a:cs typeface="+mn-cs"/>
+        <a:latin typeface="+mj-lt"/>
+        <a:ea typeface="+mj-ea"/>
+        <a:cs typeface="+mj-cs"/>
         <a:sym typeface="Helvetica Neue"/>
       </a:defRPr>
     </a:lvl9pPr>
@@ -403,9 +403,9 @@
         <a:spcPct val="117999"/>
       </a:lnSpc>
       <a:defRPr sz="2200">
-        <a:latin typeface="+mn-lt"/>
-        <a:ea typeface="+mn-ea"/>
-        <a:cs typeface="+mn-cs"/>
+        <a:latin typeface="+mj-lt"/>
+        <a:ea typeface="+mj-ea"/>
+        <a:cs typeface="+mj-cs"/>
         <a:sym typeface="Helvetica Neue"/>
       </a:defRPr>
     </a:lvl1pPr>
@@ -414,9 +414,9 @@
         <a:spcPct val="117999"/>
       </a:lnSpc>
       <a:defRPr sz="2200">
-        <a:latin typeface="+mn-lt"/>
-        <a:ea typeface="+mn-ea"/>
-        <a:cs typeface="+mn-cs"/>
+        <a:latin typeface="+mj-lt"/>
+        <a:ea typeface="+mj-ea"/>
+        <a:cs typeface="+mj-cs"/>
         <a:sym typeface="Helvetica Neue"/>
       </a:defRPr>
     </a:lvl2pPr>
@@ -425,9 +425,9 @@
         <a:spcPct val="117999"/>
       </a:lnSpc>
       <a:defRPr sz="2200">
-        <a:latin typeface="+mn-lt"/>
-        <a:ea typeface="+mn-ea"/>
-        <a:cs typeface="+mn-cs"/>
+        <a:latin typeface="+mj-lt"/>
+        <a:ea typeface="+mj-ea"/>
+        <a:cs typeface="+mj-cs"/>
         <a:sym typeface="Helvetica Neue"/>
       </a:defRPr>
     </a:lvl3pPr>
@@ -436,9 +436,9 @@
         <a:spcPct val="117999"/>
       </a:lnSpc>
       <a:defRPr sz="2200">
-        <a:latin typeface="+mn-lt"/>
-        <a:ea typeface="+mn-ea"/>
-        <a:cs typeface="+mn-cs"/>
+        <a:latin typeface="+mj-lt"/>
+        <a:ea typeface="+mj-ea"/>
+        <a:cs typeface="+mj-cs"/>
         <a:sym typeface="Helvetica Neue"/>
       </a:defRPr>
     </a:lvl4pPr>
@@ -447,9 +447,9 @@
         <a:spcPct val="117999"/>
       </a:lnSpc>
       <a:defRPr sz="2200">
-        <a:latin typeface="+mn-lt"/>
-        <a:ea typeface="+mn-ea"/>
-        <a:cs typeface="+mn-cs"/>
+        <a:latin typeface="+mj-lt"/>
+        <a:ea typeface="+mj-ea"/>
+        <a:cs typeface="+mj-cs"/>
         <a:sym typeface="Helvetica Neue"/>
       </a:defRPr>
     </a:lvl5pPr>
@@ -458,9 +458,9 @@
         <a:spcPct val="117999"/>
       </a:lnSpc>
       <a:defRPr sz="2200">
-        <a:latin typeface="+mn-lt"/>
-        <a:ea typeface="+mn-ea"/>
-        <a:cs typeface="+mn-cs"/>
+        <a:latin typeface="+mj-lt"/>
+        <a:ea typeface="+mj-ea"/>
+        <a:cs typeface="+mj-cs"/>
         <a:sym typeface="Helvetica Neue"/>
       </a:defRPr>
     </a:lvl6pPr>
@@ -469,9 +469,9 @@
         <a:spcPct val="117999"/>
       </a:lnSpc>
       <a:defRPr sz="2200">
-        <a:latin typeface="+mn-lt"/>
-        <a:ea typeface="+mn-ea"/>
-        <a:cs typeface="+mn-cs"/>
+        <a:latin typeface="+mj-lt"/>
+        <a:ea typeface="+mj-ea"/>
+        <a:cs typeface="+mj-cs"/>
         <a:sym typeface="Helvetica Neue"/>
       </a:defRPr>
     </a:lvl7pPr>
@@ -480,9 +480,9 @@
         <a:spcPct val="117999"/>
       </a:lnSpc>
       <a:defRPr sz="2200">
-        <a:latin typeface="+mn-lt"/>
-        <a:ea typeface="+mn-ea"/>
-        <a:cs typeface="+mn-cs"/>
+        <a:latin typeface="+mj-lt"/>
+        <a:ea typeface="+mj-ea"/>
+        <a:cs typeface="+mj-cs"/>
         <a:sym typeface="Helvetica Neue"/>
       </a:defRPr>
     </a:lvl8pPr>
@@ -491,9 +491,9 @@
         <a:spcPct val="117999"/>
       </a:lnSpc>
       <a:defRPr sz="2200">
-        <a:latin typeface="+mn-lt"/>
-        <a:ea typeface="+mn-ea"/>
-        <a:cs typeface="+mn-cs"/>
+        <a:latin typeface="+mj-lt"/>
+        <a:ea typeface="+mj-ea"/>
+        <a:cs typeface="+mj-cs"/>
         <a:sym typeface="Helvetica Neue"/>
       </a:defRPr>
     </a:lvl9pPr>
@@ -502,7 +502,7 @@
 </file>
 
 <file path=ppt/slideLayouts/slideLayout1.xml><?xml version="1.0" encoding="utf-8"?>
-<p:sldLayout xmlns:a="http://schemas.openxmlformats.org/drawingml/2006/main" xmlns:r="http://schemas.openxmlformats.org/officeDocument/2006/relationships" xmlns:p="http://schemas.openxmlformats.org/presentationml/2006/main" xmlns:m="http://schemas.openxmlformats.org/officeDocument/2006/math" xmlns:a14="http://schemas.microsoft.com/office/drawing/2010/main" type="title" showMasterSp="1" showMasterPhAnim="1">
+<p:sldLayout xmlns:a="http://schemas.openxmlformats.org/drawingml/2006/main" xmlns:r="http://schemas.openxmlformats.org/officeDocument/2006/relationships" xmlns:p="http://schemas.openxmlformats.org/presentationml/2006/main" xmlns:m="http://schemas.openxmlformats.org/officeDocument/2006/math" xmlns:a14="http://schemas.microsoft.com/office/drawing/2010/main" type="tx" showMasterSp="1" showMasterPhAnim="1">
   <p:cSld name="Title">
     <p:spTree>
       <p:nvGrpSpPr>
@@ -520,23 +520,23 @@
       </p:grpSpPr>
       <p:sp>
         <p:nvSpPr>
-          <p:cNvPr id="11" name="Author and Date"/>
+          <p:cNvPr id="11" name="Body Level One…"/>
           <p:cNvSpPr txBox="1"/>
           <p:nvPr>
-            <p:ph type="body" sz="quarter" idx="21" hasCustomPrompt="1"/>
+            <p:ph type="body" sz="quarter" idx="1" hasCustomPrompt="1"/>
           </p:nvPr>
         </p:nvSpPr>
         <p:spPr>
           <a:xfrm>
             <a:off x="1201340" y="11859862"/>
-            <a:ext cx="21971003" cy="636979"/>
+            <a:ext cx="21971004" cy="636980"/>
           </a:xfrm>
           <a:prstGeom prst="rect">
             <a:avLst/>
           </a:prstGeom>
         </p:spPr>
         <p:txBody>
-          <a:bodyPr lIns="45719" tIns="45719" rIns="45719" bIns="45719"/>
+          <a:bodyPr lIns="45718" tIns="45718" rIns="45718" bIns="45718" numCol="1" spcCol="38100"/>
           <a:lstStyle>
             <a:lvl1pPr marL="0" indent="0" defTabSz="825500">
               <a:lnSpc>
@@ -549,11 +549,71 @@
               <a:buNone/>
               <a:defRPr b="1" sz="3600"/>
             </a:lvl1pPr>
+            <a:lvl2pPr marL="1066800" indent="-457200" defTabSz="825500">
+              <a:lnSpc>
+                <a:spcPct val="100000"/>
+              </a:lnSpc>
+              <a:spcBef>
+                <a:spcPts val="0"/>
+              </a:spcBef>
+              <a:defRPr b="1" sz="3600"/>
+            </a:lvl2pPr>
+            <a:lvl3pPr marL="1676400" indent="-457200" defTabSz="825500">
+              <a:lnSpc>
+                <a:spcPct val="100000"/>
+              </a:lnSpc>
+              <a:spcBef>
+                <a:spcPts val="0"/>
+              </a:spcBef>
+              <a:defRPr b="1" sz="3600"/>
+            </a:lvl3pPr>
+            <a:lvl4pPr marL="2286000" indent="-457200" defTabSz="825500">
+              <a:lnSpc>
+                <a:spcPct val="100000"/>
+              </a:lnSpc>
+              <a:spcBef>
+                <a:spcPts val="0"/>
+              </a:spcBef>
+              <a:defRPr b="1" sz="3600"/>
+            </a:lvl4pPr>
+            <a:lvl5pPr marL="2895600" indent="-457200" defTabSz="825500">
+              <a:lnSpc>
+                <a:spcPct val="100000"/>
+              </a:lnSpc>
+              <a:spcBef>
+                <a:spcPts val="0"/>
+              </a:spcBef>
+              <a:defRPr b="1" sz="3600"/>
+            </a:lvl5pPr>
           </a:lstStyle>
           <a:p>
             <a:pPr/>
             <a:r>
               <a:t>Author and Date</a:t>
+            </a:r>
+          </a:p>
+          <a:p>
+            <a:pPr lvl="1"/>
+            <a:r>
+              <a:t/>
+            </a:r>
+          </a:p>
+          <a:p>
+            <a:pPr lvl="2"/>
+            <a:r>
+              <a:t/>
+            </a:r>
+          </a:p>
+          <a:p>
+            <a:pPr lvl="3"/>
+            <a:r>
+              <a:t/>
+            </a:r>
+          </a:p>
+          <a:p>
+            <a:pPr lvl="4"/>
+            <a:r>
+              <a:t/>
             </a:r>
           </a:p>
         </p:txBody>
@@ -569,7 +629,7 @@
         <p:spPr>
           <a:xfrm>
             <a:off x="1206496" y="2574991"/>
-            <a:ext cx="21971004" cy="4648201"/>
+            <a:ext cx="21971005" cy="4648202"/>
           </a:xfrm>
           <a:prstGeom prst="rect">
             <a:avLst/>
@@ -595,20 +655,20 @@
           <p:cNvPr id="13" name="Body Level One…"/>
           <p:cNvSpPr txBox="1"/>
           <p:nvPr>
-            <p:ph type="body" sz="quarter" idx="1" hasCustomPrompt="1"/>
+            <p:ph type="body" sz="quarter" idx="21" hasCustomPrompt="1"/>
           </p:nvPr>
         </p:nvSpPr>
         <p:spPr>
           <a:xfrm>
             <a:off x="1201342" y="7223190"/>
-            <a:ext cx="21971001" cy="1905001"/>
+            <a:ext cx="21971002" cy="1905002"/>
           </a:xfrm>
           <a:prstGeom prst="rect">
             <a:avLst/>
           </a:prstGeom>
         </p:spPr>
         <p:txBody>
-          <a:bodyPr/>
+          <a:bodyPr numCol="1" spcCol="38100"/>
           <a:lstStyle>
             <a:lvl1pPr marL="0" indent="0" defTabSz="825500">
               <a:lnSpc>
@@ -621,79 +681,11 @@
               <a:buNone/>
               <a:defRPr b="1" sz="5500"/>
             </a:lvl1pPr>
-            <a:lvl2pPr marL="0" indent="457200" defTabSz="825500">
-              <a:lnSpc>
-                <a:spcPct val="100000"/>
-              </a:lnSpc>
-              <a:spcBef>
-                <a:spcPts val="0"/>
-              </a:spcBef>
-              <a:buSzTx/>
-              <a:buNone/>
-              <a:defRPr b="1" sz="5500"/>
-            </a:lvl2pPr>
-            <a:lvl3pPr marL="0" indent="914400" defTabSz="825500">
-              <a:lnSpc>
-                <a:spcPct val="100000"/>
-              </a:lnSpc>
-              <a:spcBef>
-                <a:spcPts val="0"/>
-              </a:spcBef>
-              <a:buSzTx/>
-              <a:buNone/>
-              <a:defRPr b="1" sz="5500"/>
-            </a:lvl3pPr>
-            <a:lvl4pPr marL="0" indent="1371600" defTabSz="825500">
-              <a:lnSpc>
-                <a:spcPct val="100000"/>
-              </a:lnSpc>
-              <a:spcBef>
-                <a:spcPts val="0"/>
-              </a:spcBef>
-              <a:buSzTx/>
-              <a:buNone/>
-              <a:defRPr b="1" sz="5500"/>
-            </a:lvl4pPr>
-            <a:lvl5pPr marL="0" indent="1828800" defTabSz="825500">
-              <a:lnSpc>
-                <a:spcPct val="100000"/>
-              </a:lnSpc>
-              <a:spcBef>
-                <a:spcPts val="0"/>
-              </a:spcBef>
-              <a:buSzTx/>
-              <a:buNone/>
-              <a:defRPr b="1" sz="5500"/>
-            </a:lvl5pPr>
           </a:lstStyle>
           <a:p>
             <a:pPr/>
             <a:r>
               <a:t>Presentation Subtitle</a:t>
-            </a:r>
-          </a:p>
-          <a:p>
-            <a:pPr lvl="1"/>
-            <a:r>
-              <a:t/>
-            </a:r>
-          </a:p>
-          <a:p>
-            <a:pPr lvl="2"/>
-            <a:r>
-              <a:t/>
-            </a:r>
-          </a:p>
-          <a:p>
-            <a:pPr lvl="3"/>
-            <a:r>
-              <a:t/>
-            </a:r>
-          </a:p>
-          <a:p>
-            <a:pPr lvl="4"/>
-            <a:r>
-              <a:t/>
             </a:r>
           </a:p>
         </p:txBody>
@@ -764,7 +756,7 @@
           </a:prstGeom>
         </p:spPr>
         <p:txBody>
-          <a:bodyPr anchor="ctr"/>
+          <a:bodyPr numCol="1" spcCol="38100" anchor="ctr"/>
           <a:lstStyle>
             <a:lvl1pPr marL="0" indent="0" algn="ctr">
               <a:lnSpc>
@@ -782,7 +774,7 @@
                 <a:sym typeface="Helvetica Neue Medium"/>
               </a:defRPr>
             </a:lvl1pPr>
-            <a:lvl2pPr marL="0" indent="457200" algn="ctr">
+            <a:lvl2pPr marL="0" indent="0" algn="ctr">
               <a:lnSpc>
                 <a:spcPct val="80000"/>
               </a:lnSpc>
@@ -798,7 +790,7 @@
                 <a:sym typeface="Helvetica Neue Medium"/>
               </a:defRPr>
             </a:lvl2pPr>
-            <a:lvl3pPr marL="0" indent="914400" algn="ctr">
+            <a:lvl3pPr marL="0" indent="0" algn="ctr">
               <a:lnSpc>
                 <a:spcPct val="80000"/>
               </a:lnSpc>
@@ -814,7 +806,7 @@
                 <a:sym typeface="Helvetica Neue Medium"/>
               </a:defRPr>
             </a:lvl3pPr>
-            <a:lvl4pPr marL="0" indent="1371600" algn="ctr">
+            <a:lvl4pPr marL="0" indent="0" algn="ctr">
               <a:lnSpc>
                 <a:spcPct val="80000"/>
               </a:lnSpc>
@@ -830,7 +822,7 @@
                 <a:sym typeface="Helvetica Neue Medium"/>
               </a:defRPr>
             </a:lvl4pPr>
-            <a:lvl5pPr marL="0" indent="1828800" algn="ctr">
+            <a:lvl5pPr marL="0" indent="0" algn="ctr">
               <a:lnSpc>
                 <a:spcPct val="80000"/>
               </a:lnSpc>
@@ -937,15 +929,15 @@
         </p:nvSpPr>
         <p:spPr>
           <a:xfrm>
-            <a:off x="1206500" y="1075927"/>
-            <a:ext cx="21971000" cy="7241584"/>
+            <a:off x="1206500" y="1075926"/>
+            <a:ext cx="21971000" cy="7241586"/>
           </a:xfrm>
           <a:prstGeom prst="rect">
             <a:avLst/>
           </a:prstGeom>
         </p:spPr>
         <p:txBody>
-          <a:bodyPr anchor="b"/>
+          <a:bodyPr numCol="1" spcCol="38100" anchor="b"/>
           <a:lstStyle>
             <a:lvl1pPr marL="0" indent="0" algn="ctr">
               <a:lnSpc>
@@ -958,7 +950,7 @@
               <a:buNone/>
               <a:defRPr b="1" spc="-250" sz="25000"/>
             </a:lvl1pPr>
-            <a:lvl2pPr marL="0" indent="457200" algn="ctr">
+            <a:lvl2pPr marL="0" indent="0" algn="ctr">
               <a:lnSpc>
                 <a:spcPct val="80000"/>
               </a:lnSpc>
@@ -969,7 +961,7 @@
               <a:buNone/>
               <a:defRPr b="1" spc="-250" sz="25000"/>
             </a:lvl2pPr>
-            <a:lvl3pPr marL="0" indent="914400" algn="ctr">
+            <a:lvl3pPr marL="0" indent="0" algn="ctr">
               <a:lnSpc>
                 <a:spcPct val="80000"/>
               </a:lnSpc>
@@ -980,7 +972,7 @@
               <a:buNone/>
               <a:defRPr b="1" spc="-250" sz="25000"/>
             </a:lvl3pPr>
-            <a:lvl4pPr marL="0" indent="1371600" algn="ctr">
+            <a:lvl4pPr marL="0" indent="0" algn="ctr">
               <a:lnSpc>
                 <a:spcPct val="80000"/>
               </a:lnSpc>
@@ -991,7 +983,7 @@
               <a:buNone/>
               <a:defRPr b="1" spc="-250" sz="25000"/>
             </a:lvl4pPr>
-            <a:lvl5pPr marL="0" indent="1828800" algn="ctr">
+            <a:lvl5pPr marL="0" indent="0" algn="ctr">
               <a:lnSpc>
                 <a:spcPct val="80000"/>
               </a:lnSpc>
@@ -1053,7 +1045,7 @@
           </a:prstGeom>
         </p:spPr>
         <p:txBody>
-          <a:bodyPr lIns="45719" tIns="45719" rIns="45719" bIns="45719"/>
+          <a:bodyPr lIns="45718" tIns="45718" rIns="45718" bIns="45718" numCol="1" spcCol="38100"/>
           <a:lstStyle>
             <a:lvl1pPr marL="0" indent="0" algn="ctr" defTabSz="825500">
               <a:lnSpc>
@@ -1125,23 +1117,23 @@
       </p:grpSpPr>
       <p:sp>
         <p:nvSpPr>
-          <p:cNvPr id="115" name="Attribution"/>
+          <p:cNvPr id="115" name="Body Level One…"/>
           <p:cNvSpPr txBox="1"/>
           <p:nvPr>
-            <p:ph type="body" sz="quarter" idx="21" hasCustomPrompt="1"/>
+            <p:ph type="body" sz="quarter" idx="1" hasCustomPrompt="1"/>
           </p:nvPr>
         </p:nvSpPr>
         <p:spPr>
           <a:xfrm>
-            <a:off x="2430025" y="10675453"/>
-            <a:ext cx="20200052" cy="636979"/>
+            <a:off x="2430024" y="10675453"/>
+            <a:ext cx="20200054" cy="636980"/>
           </a:xfrm>
           <a:prstGeom prst="rect">
             <a:avLst/>
           </a:prstGeom>
         </p:spPr>
         <p:txBody>
-          <a:bodyPr lIns="45719" tIns="45719" rIns="45719" bIns="45719"/>
+          <a:bodyPr lIns="45718" tIns="45718" rIns="45718" bIns="45718" numCol="1" spcCol="38100"/>
           <a:lstStyle>
             <a:lvl1pPr marL="0" indent="0" defTabSz="825500">
               <a:lnSpc>
@@ -1154,11 +1146,71 @@
               <a:buNone/>
               <a:defRPr b="1" sz="3600"/>
             </a:lvl1pPr>
+            <a:lvl2pPr marL="1066800" indent="-457200" defTabSz="825500">
+              <a:lnSpc>
+                <a:spcPct val="100000"/>
+              </a:lnSpc>
+              <a:spcBef>
+                <a:spcPts val="0"/>
+              </a:spcBef>
+              <a:defRPr b="1" sz="3600"/>
+            </a:lvl2pPr>
+            <a:lvl3pPr marL="1676400" indent="-457200" defTabSz="825500">
+              <a:lnSpc>
+                <a:spcPct val="100000"/>
+              </a:lnSpc>
+              <a:spcBef>
+                <a:spcPts val="0"/>
+              </a:spcBef>
+              <a:defRPr b="1" sz="3600"/>
+            </a:lvl3pPr>
+            <a:lvl4pPr marL="2286000" indent="-457200" defTabSz="825500">
+              <a:lnSpc>
+                <a:spcPct val="100000"/>
+              </a:lnSpc>
+              <a:spcBef>
+                <a:spcPts val="0"/>
+              </a:spcBef>
+              <a:defRPr b="1" sz="3600"/>
+            </a:lvl4pPr>
+            <a:lvl5pPr marL="2895600" indent="-457200" defTabSz="825500">
+              <a:lnSpc>
+                <a:spcPct val="100000"/>
+              </a:lnSpc>
+              <a:spcBef>
+                <a:spcPts val="0"/>
+              </a:spcBef>
+              <a:defRPr b="1" sz="3600"/>
+            </a:lvl5pPr>
           </a:lstStyle>
           <a:p>
             <a:pPr/>
             <a:r>
               <a:t>Attribution</a:t>
+            </a:r>
+          </a:p>
+          <a:p>
+            <a:pPr lvl="1"/>
+            <a:r>
+              <a:t/>
+            </a:r>
+          </a:p>
+          <a:p>
+            <a:pPr lvl="2"/>
+            <a:r>
+              <a:t/>
+            </a:r>
+          </a:p>
+          <a:p>
+            <a:pPr lvl="3"/>
+            <a:r>
+              <a:t/>
+            </a:r>
+          </a:p>
+          <a:p>
+            <a:pPr lvl="4"/>
+            <a:r>
+              <a:t/>
             </a:r>
           </a:p>
         </p:txBody>
@@ -1168,115 +1220,39 @@
           <p:cNvPr id="116" name="Body Level One…"/>
           <p:cNvSpPr txBox="1"/>
           <p:nvPr>
-            <p:ph type="body" sz="half" idx="1" hasCustomPrompt="1"/>
+            <p:ph type="body" sz="half" idx="21" hasCustomPrompt="1"/>
           </p:nvPr>
         </p:nvSpPr>
         <p:spPr>
           <a:xfrm>
             <a:off x="1753923" y="4939860"/>
-            <a:ext cx="20876154" cy="3836280"/>
+            <a:ext cx="20876154" cy="3836281"/>
           </a:xfrm>
           <a:prstGeom prst="rect">
             <a:avLst/>
           </a:prstGeom>
         </p:spPr>
         <p:txBody>
-          <a:bodyPr/>
+          <a:bodyPr numCol="1" spcCol="38100"/>
           <a:lstStyle>
-            <a:lvl1pPr marL="638923" indent="-469900">
+            <a:lvl1pPr marL="469900" indent="-300876">
               <a:spcBef>
                 <a:spcPts val="0"/>
               </a:spcBef>
               <a:buSzTx/>
               <a:buNone/>
-              <a:defRPr spc="-170" sz="8500">
+              <a:defRPr spc="-200" sz="8500">
                 <a:latin typeface="Helvetica Neue Medium"/>
                 <a:ea typeface="Helvetica Neue Medium"/>
                 <a:cs typeface="Helvetica Neue Medium"/>
                 <a:sym typeface="Helvetica Neue Medium"/>
               </a:defRPr>
             </a:lvl1pPr>
-            <a:lvl2pPr marL="638923" indent="-12700">
-              <a:spcBef>
-                <a:spcPts val="0"/>
-              </a:spcBef>
-              <a:buSzTx/>
-              <a:buNone/>
-              <a:defRPr spc="-170" sz="8500">
-                <a:latin typeface="Helvetica Neue Medium"/>
-                <a:ea typeface="Helvetica Neue Medium"/>
-                <a:cs typeface="Helvetica Neue Medium"/>
-                <a:sym typeface="Helvetica Neue Medium"/>
-              </a:defRPr>
-            </a:lvl2pPr>
-            <a:lvl3pPr marL="638923" indent="444500">
-              <a:spcBef>
-                <a:spcPts val="0"/>
-              </a:spcBef>
-              <a:buSzTx/>
-              <a:buNone/>
-              <a:defRPr spc="-170" sz="8500">
-                <a:latin typeface="Helvetica Neue Medium"/>
-                <a:ea typeface="Helvetica Neue Medium"/>
-                <a:cs typeface="Helvetica Neue Medium"/>
-                <a:sym typeface="Helvetica Neue Medium"/>
-              </a:defRPr>
-            </a:lvl3pPr>
-            <a:lvl4pPr marL="638923" indent="901700">
-              <a:spcBef>
-                <a:spcPts val="0"/>
-              </a:spcBef>
-              <a:buSzTx/>
-              <a:buNone/>
-              <a:defRPr spc="-170" sz="8500">
-                <a:latin typeface="Helvetica Neue Medium"/>
-                <a:ea typeface="Helvetica Neue Medium"/>
-                <a:cs typeface="Helvetica Neue Medium"/>
-                <a:sym typeface="Helvetica Neue Medium"/>
-              </a:defRPr>
-            </a:lvl4pPr>
-            <a:lvl5pPr marL="638923" indent="1358900">
-              <a:spcBef>
-                <a:spcPts val="0"/>
-              </a:spcBef>
-              <a:buSzTx/>
-              <a:buNone/>
-              <a:defRPr spc="-170" sz="8500">
-                <a:latin typeface="Helvetica Neue Medium"/>
-                <a:ea typeface="Helvetica Neue Medium"/>
-                <a:cs typeface="Helvetica Neue Medium"/>
-                <a:sym typeface="Helvetica Neue Medium"/>
-              </a:defRPr>
-            </a:lvl5pPr>
           </a:lstStyle>
           <a:p>
             <a:pPr/>
             <a:r>
               <a:t>“Notable Quote”</a:t>
-            </a:r>
-          </a:p>
-          <a:p>
-            <a:pPr lvl="1"/>
-            <a:r>
-              <a:t/>
-            </a:r>
-          </a:p>
-          <a:p>
-            <a:pPr lvl="2"/>
-            <a:r>
-              <a:t/>
-            </a:r>
-          </a:p>
-          <a:p>
-            <a:pPr lvl="3"/>
-            <a:r>
-              <a:t/>
-            </a:r>
-          </a:p>
-          <a:p>
-            <a:pPr lvl="4"/>
-            <a:r>
-              <a:t/>
             </a:r>
           </a:p>
         </p:txBody>
@@ -1347,7 +1323,7 @@
           </a:prstGeom>
         </p:spPr>
         <p:txBody>
-          <a:bodyPr lIns="91439" tIns="45719" rIns="91439" bIns="45719">
+          <a:bodyPr lIns="91439" tIns="45719" rIns="91439" bIns="45719" numCol="1" spcCol="38100">
             <a:noAutofit/>
           </a:bodyPr>
           <a:lstStyle/>
@@ -1374,7 +1350,7 @@
           </a:prstGeom>
         </p:spPr>
         <p:txBody>
-          <a:bodyPr lIns="91439" tIns="45719" rIns="91439" bIns="45719">
+          <a:bodyPr lIns="91439" tIns="45719" rIns="91439" bIns="45719" numCol="1" spcCol="38100">
             <a:noAutofit/>
           </a:bodyPr>
           <a:lstStyle/>
@@ -1393,15 +1369,15 @@
         </p:nvSpPr>
         <p:spPr>
           <a:xfrm>
-            <a:off x="-124635" y="1270000"/>
-            <a:ext cx="16840169" cy="11243712"/>
+            <a:off x="-124636" y="1270000"/>
+            <a:ext cx="16840170" cy="11243713"/>
           </a:xfrm>
           <a:prstGeom prst="rect">
             <a:avLst/>
           </a:prstGeom>
         </p:spPr>
         <p:txBody>
-          <a:bodyPr lIns="91439" tIns="45719" rIns="91439" bIns="45719">
+          <a:bodyPr lIns="91439" tIns="45719" rIns="91439" bIns="45719" numCol="1" spcCol="38100">
             <a:noAutofit/>
           </a:bodyPr>
           <a:lstStyle/>
@@ -1483,7 +1459,7 @@
           </a:prstGeom>
         </p:spPr>
         <p:txBody>
-          <a:bodyPr lIns="91439" tIns="45719" rIns="91439" bIns="45719">
+          <a:bodyPr lIns="91439" tIns="45719" rIns="91439" bIns="45719" numCol="1" spcCol="38100">
             <a:noAutofit/>
           </a:bodyPr>
           <a:lstStyle/>
@@ -1621,7 +1597,7 @@
           </a:prstGeom>
         </p:spPr>
         <p:txBody>
-          <a:bodyPr lIns="91439" tIns="45719" rIns="91439" bIns="45719">
+          <a:bodyPr lIns="91439" tIns="45719" rIns="91439" bIns="45719" numCol="1" spcCol="38100">
             <a:noAutofit/>
           </a:bodyPr>
           <a:lstStyle/>
@@ -1664,23 +1640,23 @@
       </p:sp>
       <p:sp>
         <p:nvSpPr>
-          <p:cNvPr id="23" name="Author and Date"/>
+          <p:cNvPr id="23" name="Body Level One…"/>
           <p:cNvSpPr txBox="1"/>
           <p:nvPr>
-            <p:ph type="body" sz="quarter" idx="22" hasCustomPrompt="1"/>
+            <p:ph type="body" sz="quarter" idx="1" hasCustomPrompt="1"/>
           </p:nvPr>
         </p:nvSpPr>
         <p:spPr>
           <a:xfrm>
             <a:off x="1207690" y="1106137"/>
-            <a:ext cx="21968621" cy="636979"/>
+            <a:ext cx="21968621" cy="636980"/>
           </a:xfrm>
           <a:prstGeom prst="rect">
             <a:avLst/>
           </a:prstGeom>
         </p:spPr>
         <p:txBody>
-          <a:bodyPr lIns="45719" tIns="45719" rIns="45719" bIns="45719"/>
+          <a:bodyPr lIns="45718" tIns="45718" rIns="45718" bIns="45718" numCol="1" spcCol="38100"/>
           <a:lstStyle>
             <a:lvl1pPr marL="0" indent="0" defTabSz="825500">
               <a:lnSpc>
@@ -1693,11 +1669,71 @@
               <a:buNone/>
               <a:defRPr b="1" sz="3600"/>
             </a:lvl1pPr>
+            <a:lvl2pPr marL="1066800" indent="-457200" defTabSz="825500">
+              <a:lnSpc>
+                <a:spcPct val="100000"/>
+              </a:lnSpc>
+              <a:spcBef>
+                <a:spcPts val="0"/>
+              </a:spcBef>
+              <a:defRPr b="1" sz="3600"/>
+            </a:lvl2pPr>
+            <a:lvl3pPr marL="1676400" indent="-457200" defTabSz="825500">
+              <a:lnSpc>
+                <a:spcPct val="100000"/>
+              </a:lnSpc>
+              <a:spcBef>
+                <a:spcPts val="0"/>
+              </a:spcBef>
+              <a:defRPr b="1" sz="3600"/>
+            </a:lvl3pPr>
+            <a:lvl4pPr marL="2286000" indent="-457200" defTabSz="825500">
+              <a:lnSpc>
+                <a:spcPct val="100000"/>
+              </a:lnSpc>
+              <a:spcBef>
+                <a:spcPts val="0"/>
+              </a:spcBef>
+              <a:defRPr b="1" sz="3600"/>
+            </a:lvl4pPr>
+            <a:lvl5pPr marL="2895600" indent="-457200" defTabSz="825500">
+              <a:lnSpc>
+                <a:spcPct val="100000"/>
+              </a:lnSpc>
+              <a:spcBef>
+                <a:spcPts val="0"/>
+              </a:spcBef>
+              <a:defRPr b="1" sz="3600"/>
+            </a:lvl5pPr>
           </a:lstStyle>
           <a:p>
             <a:pPr/>
             <a:r>
               <a:t>Author and Date</a:t>
+            </a:r>
+          </a:p>
+          <a:p>
+            <a:pPr lvl="1"/>
+            <a:r>
+              <a:t/>
+            </a:r>
+          </a:p>
+          <a:p>
+            <a:pPr lvl="2"/>
+            <a:r>
+              <a:t/>
+            </a:r>
+          </a:p>
+          <a:p>
+            <a:pPr lvl="3"/>
+            <a:r>
+              <a:t/>
+            </a:r>
+          </a:p>
+          <a:p>
+            <a:pPr lvl="4"/>
+            <a:r>
+              <a:t/>
             </a:r>
           </a:p>
         </p:txBody>
@@ -1707,20 +1743,20 @@
           <p:cNvPr id="24" name="Body Level One…"/>
           <p:cNvSpPr txBox="1"/>
           <p:nvPr>
-            <p:ph type="body" sz="quarter" idx="1" hasCustomPrompt="1"/>
+            <p:ph type="body" sz="quarter" idx="22" hasCustomPrompt="1"/>
           </p:nvPr>
         </p:nvSpPr>
         <p:spPr>
           <a:xfrm>
-            <a:off x="1206500" y="11609910"/>
-            <a:ext cx="21971000" cy="1116952"/>
+            <a:off x="1206500" y="11609909"/>
+            <a:ext cx="21971000" cy="1116953"/>
           </a:xfrm>
           <a:prstGeom prst="rect">
             <a:avLst/>
           </a:prstGeom>
         </p:spPr>
         <p:txBody>
-          <a:bodyPr/>
+          <a:bodyPr numCol="1" spcCol="38100"/>
           <a:lstStyle>
             <a:lvl1pPr marL="0" indent="0" defTabSz="825500">
               <a:lnSpc>
@@ -1733,79 +1769,11 @@
               <a:buNone/>
               <a:defRPr b="1" sz="5500"/>
             </a:lvl1pPr>
-            <a:lvl2pPr marL="0" indent="457200" defTabSz="825500">
-              <a:lnSpc>
-                <a:spcPct val="100000"/>
-              </a:lnSpc>
-              <a:spcBef>
-                <a:spcPts val="0"/>
-              </a:spcBef>
-              <a:buSzTx/>
-              <a:buNone/>
-              <a:defRPr b="1" sz="5500"/>
-            </a:lvl2pPr>
-            <a:lvl3pPr marL="0" indent="914400" defTabSz="825500">
-              <a:lnSpc>
-                <a:spcPct val="100000"/>
-              </a:lnSpc>
-              <a:spcBef>
-                <a:spcPts val="0"/>
-              </a:spcBef>
-              <a:buSzTx/>
-              <a:buNone/>
-              <a:defRPr b="1" sz="5500"/>
-            </a:lvl3pPr>
-            <a:lvl4pPr marL="0" indent="1371600" defTabSz="825500">
-              <a:lnSpc>
-                <a:spcPct val="100000"/>
-              </a:lnSpc>
-              <a:spcBef>
-                <a:spcPts val="0"/>
-              </a:spcBef>
-              <a:buSzTx/>
-              <a:buNone/>
-              <a:defRPr b="1" sz="5500"/>
-            </a:lvl4pPr>
-            <a:lvl5pPr marL="0" indent="1828800" defTabSz="825500">
-              <a:lnSpc>
-                <a:spcPct val="100000"/>
-              </a:lnSpc>
-              <a:spcBef>
-                <a:spcPts val="0"/>
-              </a:spcBef>
-              <a:buSzTx/>
-              <a:buNone/>
-              <a:defRPr b="1" sz="5500"/>
-            </a:lvl5pPr>
           </a:lstStyle>
           <a:p>
             <a:pPr/>
             <a:r>
               <a:t>Presentation Subtitle</a:t>
-            </a:r>
-          </a:p>
-          <a:p>
-            <a:pPr lvl="1"/>
-            <a:r>
-              <a:t/>
-            </a:r>
-          </a:p>
-          <a:p>
-            <a:pPr lvl="2"/>
-            <a:r>
-              <a:t/>
-            </a:r>
-          </a:p>
-          <a:p>
-            <a:pPr lvl="3"/>
-            <a:r>
-              <a:t/>
-            </a:r>
-          </a:p>
-          <a:p>
-            <a:pPr lvl="4"/>
-            <a:r>
-              <a:t/>
             </a:r>
           </a:p>
         </p:txBody>
@@ -1876,7 +1844,7 @@
           </a:prstGeom>
         </p:spPr>
         <p:txBody>
-          <a:bodyPr lIns="91439" tIns="45719" rIns="91439" bIns="45719">
+          <a:bodyPr lIns="91439" tIns="45719" rIns="91439" bIns="45719" numCol="1" spcCol="38100">
             <a:noAutofit/>
           </a:bodyPr>
           <a:lstStyle/>
@@ -1896,7 +1864,7 @@
         <p:spPr>
           <a:xfrm>
             <a:off x="1206500" y="1270000"/>
-            <a:ext cx="9779000" cy="5882273"/>
+            <a:ext cx="9779000" cy="5882274"/>
           </a:xfrm>
           <a:prstGeom prst="rect">
             <a:avLst/>
@@ -1931,7 +1899,7 @@
           </a:prstGeom>
         </p:spPr>
         <p:txBody>
-          <a:bodyPr/>
+          <a:bodyPr numCol="1" spcCol="38100"/>
           <a:lstStyle>
             <a:lvl1pPr marL="0" indent="0" defTabSz="825500">
               <a:lnSpc>
@@ -1944,7 +1912,7 @@
               <a:buNone/>
               <a:defRPr b="1" sz="5500"/>
             </a:lvl1pPr>
-            <a:lvl2pPr marL="0" indent="457200" defTabSz="825500">
+            <a:lvl2pPr marL="0" indent="0" defTabSz="825500">
               <a:lnSpc>
                 <a:spcPct val="100000"/>
               </a:lnSpc>
@@ -1955,7 +1923,7 @@
               <a:buNone/>
               <a:defRPr b="1" sz="5500"/>
             </a:lvl2pPr>
-            <a:lvl3pPr marL="0" indent="914400" defTabSz="825500">
+            <a:lvl3pPr marL="0" indent="0" defTabSz="825500">
               <a:lnSpc>
                 <a:spcPct val="100000"/>
               </a:lnSpc>
@@ -1966,7 +1934,7 @@
               <a:buNone/>
               <a:defRPr b="1" sz="5500"/>
             </a:lvl3pPr>
-            <a:lvl4pPr marL="0" indent="1371600" defTabSz="825500">
+            <a:lvl4pPr marL="0" indent="0" defTabSz="825500">
               <a:lnSpc>
                 <a:spcPct val="100000"/>
               </a:lnSpc>
@@ -1977,7 +1945,7 @@
               <a:buNone/>
               <a:defRPr b="1" sz="5500"/>
             </a:lvl4pPr>
-            <a:lvl5pPr marL="0" indent="1828800" defTabSz="825500">
+            <a:lvl5pPr marL="0" indent="0" defTabSz="825500">
               <a:lnSpc>
                 <a:spcPct val="100000"/>
               </a:lnSpc>
@@ -2031,8 +1999,8 @@
         </p:nvSpPr>
         <p:spPr>
           <a:xfrm>
-            <a:off x="12001499" y="13085233"/>
-            <a:ext cx="368505" cy="374600"/>
+            <a:off x="12001500" y="13085233"/>
+            <a:ext cx="368504" cy="374600"/>
           </a:xfrm>
           <a:prstGeom prst="rect">
             <a:avLst/>
@@ -2082,6 +2050,10 @@
           </p:nvPr>
         </p:nvSpPr>
         <p:spPr>
+          <a:xfrm>
+            <a:off x="1206500" y="1079500"/>
+            <a:ext cx="21971000" cy="1433164"/>
+          </a:xfrm>
           <a:prstGeom prst="rect">
             <a:avLst/>
           </a:prstGeom>
@@ -2099,23 +2071,23 @@
       </p:sp>
       <p:sp>
         <p:nvSpPr>
-          <p:cNvPr id="43" name="Slide Subtitle"/>
+          <p:cNvPr id="43" name="Body Level One…"/>
           <p:cNvSpPr txBox="1"/>
           <p:nvPr>
-            <p:ph type="body" sz="quarter" idx="21" hasCustomPrompt="1"/>
+            <p:ph type="body" sz="quarter" idx="1" hasCustomPrompt="1"/>
           </p:nvPr>
         </p:nvSpPr>
         <p:spPr>
           <a:xfrm>
-            <a:off x="1206500" y="2372962"/>
-            <a:ext cx="21971000" cy="934780"/>
+            <a:off x="1206500" y="2372961"/>
+            <a:ext cx="21971000" cy="934781"/>
           </a:xfrm>
           <a:prstGeom prst="rect">
             <a:avLst/>
           </a:prstGeom>
         </p:spPr>
         <p:txBody>
-          <a:bodyPr lIns="45719" tIns="45719" rIns="45719" bIns="45719"/>
+          <a:bodyPr lIns="45718" tIns="45718" rIns="45718" bIns="45718" numCol="1" spcCol="38100"/>
           <a:lstStyle>
             <a:lvl1pPr marL="0" indent="0" defTabSz="825500">
               <a:lnSpc>
@@ -2128,11 +2100,71 @@
               <a:buNone/>
               <a:defRPr b="1" sz="5500"/>
             </a:lvl1pPr>
+            <a:lvl2pPr marL="1308100" indent="-698500" defTabSz="825500">
+              <a:lnSpc>
+                <a:spcPct val="100000"/>
+              </a:lnSpc>
+              <a:spcBef>
+                <a:spcPts val="0"/>
+              </a:spcBef>
+              <a:defRPr b="1" sz="5500"/>
+            </a:lvl2pPr>
+            <a:lvl3pPr marL="1917700" indent="-698500" defTabSz="825500">
+              <a:lnSpc>
+                <a:spcPct val="100000"/>
+              </a:lnSpc>
+              <a:spcBef>
+                <a:spcPts val="0"/>
+              </a:spcBef>
+              <a:defRPr b="1" sz="5500"/>
+            </a:lvl3pPr>
+            <a:lvl4pPr marL="2527300" indent="-698500" defTabSz="825500">
+              <a:lnSpc>
+                <a:spcPct val="100000"/>
+              </a:lnSpc>
+              <a:spcBef>
+                <a:spcPts val="0"/>
+              </a:spcBef>
+              <a:defRPr b="1" sz="5500"/>
+            </a:lvl4pPr>
+            <a:lvl5pPr marL="3136900" indent="-698500" defTabSz="825500">
+              <a:lnSpc>
+                <a:spcPct val="100000"/>
+              </a:lnSpc>
+              <a:spcBef>
+                <a:spcPts val="0"/>
+              </a:spcBef>
+              <a:defRPr b="1" sz="5500"/>
+            </a:lvl5pPr>
           </a:lstStyle>
           <a:p>
             <a:pPr/>
             <a:r>
               <a:t>Slide Subtitle</a:t>
+            </a:r>
+          </a:p>
+          <a:p>
+            <a:pPr lvl="1"/>
+            <a:r>
+              <a:t/>
+            </a:r>
+          </a:p>
+          <a:p>
+            <a:pPr lvl="2"/>
+            <a:r>
+              <a:t/>
+            </a:r>
+          </a:p>
+          <a:p>
+            <a:pPr lvl="3"/>
+            <a:r>
+              <a:t/>
+            </a:r>
+          </a:p>
+          <a:p>
+            <a:pPr lvl="4"/>
+            <a:r>
+              <a:t/>
             </a:r>
           </a:p>
         </p:txBody>
@@ -2142,45 +2174,25 @@
           <p:cNvPr id="44" name="Body Level One…"/>
           <p:cNvSpPr txBox="1"/>
           <p:nvPr>
-            <p:ph type="body" idx="1" hasCustomPrompt="1"/>
+            <p:ph type="body" idx="21" hasCustomPrompt="1"/>
           </p:nvPr>
         </p:nvSpPr>
         <p:spPr>
+          <a:xfrm>
+            <a:off x="1206500" y="4248503"/>
+            <a:ext cx="21971000" cy="8256014"/>
+          </a:xfrm>
           <a:prstGeom prst="rect">
             <a:avLst/>
           </a:prstGeom>
         </p:spPr>
         <p:txBody>
-          <a:bodyPr/>
+          <a:bodyPr numCol="1" spcCol="38100"/>
           <a:lstStyle/>
           <a:p>
             <a:pPr/>
             <a:r>
               <a:t>Slide bullet text</a:t>
-            </a:r>
-          </a:p>
-          <a:p>
-            <a:pPr lvl="1"/>
-            <a:r>
-              <a:t/>
-            </a:r>
-          </a:p>
-          <a:p>
-            <a:pPr lvl="2"/>
-            <a:r>
-              <a:t/>
-            </a:r>
-          </a:p>
-          <a:p>
-            <a:pPr lvl="3"/>
-            <a:r>
-              <a:t/>
-            </a:r>
-          </a:p>
-          <a:p>
-            <a:pPr lvl="4"/>
-            <a:r>
-              <a:t/>
             </a:r>
           </a:p>
         </p:txBody>
@@ -2247,7 +2259,7 @@
           </a:prstGeom>
         </p:spPr>
         <p:txBody>
-          <a:bodyPr numCol="2" spcCol="1098550"/>
+          <a:bodyPr/>
           <a:lstStyle/>
           <a:p>
             <a:pPr/>
@@ -2331,23 +2343,23 @@
       </p:grpSpPr>
       <p:sp>
         <p:nvSpPr>
-          <p:cNvPr id="60" name="Slide Subtitle"/>
+          <p:cNvPr id="60" name="Body Level One…"/>
           <p:cNvSpPr txBox="1"/>
           <p:nvPr>
-            <p:ph type="body" sz="quarter" idx="21" hasCustomPrompt="1"/>
+            <p:ph type="body" sz="quarter" idx="1" hasCustomPrompt="1"/>
           </p:nvPr>
         </p:nvSpPr>
         <p:spPr>
           <a:xfrm>
-            <a:off x="1206500" y="2372962"/>
-            <a:ext cx="9779000" cy="934780"/>
+            <a:off x="1206500" y="2372961"/>
+            <a:ext cx="9779000" cy="934781"/>
           </a:xfrm>
           <a:prstGeom prst="rect">
             <a:avLst/>
           </a:prstGeom>
         </p:spPr>
         <p:txBody>
-          <a:bodyPr lIns="45719" tIns="45719" rIns="45719" bIns="45719"/>
+          <a:bodyPr lIns="45718" tIns="45718" rIns="45718" bIns="45718" numCol="1" spcCol="38100"/>
           <a:lstStyle>
             <a:lvl1pPr marL="0" indent="0" defTabSz="825500">
               <a:lnSpc>
@@ -2360,11 +2372,71 @@
               <a:buNone/>
               <a:defRPr b="1" sz="5500"/>
             </a:lvl1pPr>
+            <a:lvl2pPr marL="1308100" indent="-698500" defTabSz="825500">
+              <a:lnSpc>
+                <a:spcPct val="100000"/>
+              </a:lnSpc>
+              <a:spcBef>
+                <a:spcPts val="0"/>
+              </a:spcBef>
+              <a:defRPr b="1" sz="5500"/>
+            </a:lvl2pPr>
+            <a:lvl3pPr marL="1917700" indent="-698500" defTabSz="825500">
+              <a:lnSpc>
+                <a:spcPct val="100000"/>
+              </a:lnSpc>
+              <a:spcBef>
+                <a:spcPts val="0"/>
+              </a:spcBef>
+              <a:defRPr b="1" sz="5500"/>
+            </a:lvl3pPr>
+            <a:lvl4pPr marL="2527300" indent="-698500" defTabSz="825500">
+              <a:lnSpc>
+                <a:spcPct val="100000"/>
+              </a:lnSpc>
+              <a:spcBef>
+                <a:spcPts val="0"/>
+              </a:spcBef>
+              <a:defRPr b="1" sz="5500"/>
+            </a:lvl4pPr>
+            <a:lvl5pPr marL="3136900" indent="-698500" defTabSz="825500">
+              <a:lnSpc>
+                <a:spcPct val="100000"/>
+              </a:lnSpc>
+              <a:spcBef>
+                <a:spcPts val="0"/>
+              </a:spcBef>
+              <a:defRPr b="1" sz="5500"/>
+            </a:lvl5pPr>
           </a:lstStyle>
           <a:p>
             <a:pPr/>
             <a:r>
               <a:t>Slide Subtitle</a:t>
+            </a:r>
+          </a:p>
+          <a:p>
+            <a:pPr lvl="1"/>
+            <a:r>
+              <a:t/>
+            </a:r>
+          </a:p>
+          <a:p>
+            <a:pPr lvl="2"/>
+            <a:r>
+              <a:t/>
+            </a:r>
+          </a:p>
+          <a:p>
+            <a:pPr lvl="3"/>
+            <a:r>
+              <a:t/>
+            </a:r>
+          </a:p>
+          <a:p>
+            <a:pPr lvl="4"/>
+            <a:r>
+              <a:t/>
             </a:r>
           </a:p>
         </p:txBody>
@@ -2374,49 +2446,25 @@
           <p:cNvPr id="61" name="Body Level One…"/>
           <p:cNvSpPr txBox="1"/>
           <p:nvPr>
-            <p:ph type="body" sz="half" idx="1" hasCustomPrompt="1"/>
+            <p:ph type="body" sz="half" idx="21" hasCustomPrompt="1"/>
           </p:nvPr>
         </p:nvSpPr>
         <p:spPr>
           <a:xfrm>
-            <a:off x="1206500" y="4248504"/>
-            <a:ext cx="9779000" cy="8256630"/>
+            <a:off x="1206500" y="4248503"/>
+            <a:ext cx="9779000" cy="8256631"/>
           </a:xfrm>
           <a:prstGeom prst="rect">
             <a:avLst/>
           </a:prstGeom>
         </p:spPr>
         <p:txBody>
-          <a:bodyPr/>
+          <a:bodyPr numCol="1" spcCol="38100"/>
           <a:lstStyle/>
           <a:p>
             <a:pPr/>
             <a:r>
               <a:t>Slide bullet text</a:t>
-            </a:r>
-          </a:p>
-          <a:p>
-            <a:pPr lvl="1"/>
-            <a:r>
-              <a:t/>
-            </a:r>
-          </a:p>
-          <a:p>
-            <a:pPr lvl="2"/>
-            <a:r>
-              <a:t/>
-            </a:r>
-          </a:p>
-          <a:p>
-            <a:pPr lvl="3"/>
-            <a:r>
-              <a:t/>
-            </a:r>
-          </a:p>
-          <a:p>
-            <a:pPr lvl="4"/>
-            <a:r>
-              <a:t/>
             </a:r>
           </a:p>
         </p:txBody>
@@ -2431,15 +2479,15 @@
         </p:nvSpPr>
         <p:spPr>
           <a:xfrm>
-            <a:off x="9271000" y="1263848"/>
-            <a:ext cx="16773843" cy="11188205"/>
+            <a:off x="9271000" y="1263847"/>
+            <a:ext cx="16773843" cy="11188206"/>
           </a:xfrm>
           <a:prstGeom prst="rect">
             <a:avLst/>
           </a:prstGeom>
         </p:spPr>
         <p:txBody>
-          <a:bodyPr lIns="91439" tIns="45719" rIns="91439" bIns="45719">
+          <a:bodyPr lIns="91439" tIns="45719" rIns="91439" bIns="45719" numCol="1" spcCol="38100">
             <a:noAutofit/>
           </a:bodyPr>
           <a:lstStyle/>
@@ -2535,7 +2583,7 @@
         <p:spPr>
           <a:xfrm>
             <a:off x="1206496" y="4533900"/>
-            <a:ext cx="21971004" cy="4648200"/>
+            <a:ext cx="21971005" cy="4648200"/>
           </a:xfrm>
           <a:prstGeom prst="rect">
             <a:avLst/>
@@ -2571,8 +2619,8 @@
         </p:nvSpPr>
         <p:spPr>
           <a:xfrm>
-            <a:off x="12001499" y="13085233"/>
-            <a:ext cx="368505" cy="374600"/>
+            <a:off x="12001500" y="13085233"/>
+            <a:ext cx="368504" cy="374600"/>
           </a:xfrm>
           <a:prstGeom prst="rect">
             <a:avLst/>
@@ -2624,7 +2672,7 @@
         <p:spPr>
           <a:xfrm>
             <a:off x="1206500" y="1079500"/>
-            <a:ext cx="21971000" cy="1434949"/>
+            <a:ext cx="21971000" cy="1434950"/>
           </a:xfrm>
           <a:prstGeom prst="rect">
             <a:avLst/>
@@ -2643,23 +2691,23 @@
       </p:sp>
       <p:sp>
         <p:nvSpPr>
-          <p:cNvPr id="80" name="Slide Subtitle"/>
+          <p:cNvPr id="80" name="Body Level One…"/>
           <p:cNvSpPr txBox="1"/>
           <p:nvPr>
-            <p:ph type="body" sz="quarter" idx="21" hasCustomPrompt="1"/>
+            <p:ph type="body" sz="quarter" idx="1" hasCustomPrompt="1"/>
           </p:nvPr>
         </p:nvSpPr>
         <p:spPr>
           <a:xfrm>
-            <a:off x="1206500" y="2372962"/>
-            <a:ext cx="21971000" cy="934780"/>
+            <a:off x="1206500" y="2372961"/>
+            <a:ext cx="21971000" cy="934781"/>
           </a:xfrm>
           <a:prstGeom prst="rect">
             <a:avLst/>
           </a:prstGeom>
         </p:spPr>
         <p:txBody>
-          <a:bodyPr lIns="45719" tIns="45719" rIns="45719" bIns="45719"/>
+          <a:bodyPr lIns="45718" tIns="45718" rIns="45718" bIns="45718" numCol="1" spcCol="38100"/>
           <a:lstStyle>
             <a:lvl1pPr marL="0" indent="0" defTabSz="825500">
               <a:lnSpc>
@@ -2672,11 +2720,71 @@
               <a:buNone/>
               <a:defRPr b="1" sz="5500"/>
             </a:lvl1pPr>
+            <a:lvl2pPr marL="1308100" indent="-698500" defTabSz="825500">
+              <a:lnSpc>
+                <a:spcPct val="100000"/>
+              </a:lnSpc>
+              <a:spcBef>
+                <a:spcPts val="0"/>
+              </a:spcBef>
+              <a:defRPr b="1" sz="5500"/>
+            </a:lvl2pPr>
+            <a:lvl3pPr marL="1917700" indent="-698500" defTabSz="825500">
+              <a:lnSpc>
+                <a:spcPct val="100000"/>
+              </a:lnSpc>
+              <a:spcBef>
+                <a:spcPts val="0"/>
+              </a:spcBef>
+              <a:defRPr b="1" sz="5500"/>
+            </a:lvl3pPr>
+            <a:lvl4pPr marL="2527300" indent="-698500" defTabSz="825500">
+              <a:lnSpc>
+                <a:spcPct val="100000"/>
+              </a:lnSpc>
+              <a:spcBef>
+                <a:spcPts val="0"/>
+              </a:spcBef>
+              <a:defRPr b="1" sz="5500"/>
+            </a:lvl4pPr>
+            <a:lvl5pPr marL="3136900" indent="-698500" defTabSz="825500">
+              <a:lnSpc>
+                <a:spcPct val="100000"/>
+              </a:lnSpc>
+              <a:spcBef>
+                <a:spcPts val="0"/>
+              </a:spcBef>
+              <a:defRPr b="1" sz="5500"/>
+            </a:lvl5pPr>
           </a:lstStyle>
           <a:p>
             <a:pPr/>
             <a:r>
               <a:t>Slide Subtitle</a:t>
+            </a:r>
+          </a:p>
+          <a:p>
+            <a:pPr lvl="1"/>
+            <a:r>
+              <a:t/>
+            </a:r>
+          </a:p>
+          <a:p>
+            <a:pPr lvl="2"/>
+            <a:r>
+              <a:t/>
+            </a:r>
+          </a:p>
+          <a:p>
+            <a:pPr lvl="3"/>
+            <a:r>
+              <a:t/>
+            </a:r>
+          </a:p>
+          <a:p>
+            <a:pPr lvl="4"/>
+            <a:r>
+              <a:t/>
             </a:r>
           </a:p>
         </p:txBody>
@@ -2759,23 +2867,23 @@
       </p:sp>
       <p:sp>
         <p:nvSpPr>
-          <p:cNvPr id="89" name="Agenda Subtitle"/>
+          <p:cNvPr id="89" name="Body Level One…"/>
           <p:cNvSpPr txBox="1"/>
           <p:nvPr>
-            <p:ph type="body" sz="quarter" idx="21" hasCustomPrompt="1"/>
+            <p:ph type="body" sz="quarter" idx="1" hasCustomPrompt="1"/>
           </p:nvPr>
         </p:nvSpPr>
         <p:spPr>
           <a:xfrm>
-            <a:off x="1206500" y="2372962"/>
-            <a:ext cx="21971000" cy="934780"/>
+            <a:off x="1206500" y="2372961"/>
+            <a:ext cx="21971000" cy="934781"/>
           </a:xfrm>
           <a:prstGeom prst="rect">
             <a:avLst/>
           </a:prstGeom>
         </p:spPr>
         <p:txBody>
-          <a:bodyPr lIns="45719" tIns="45719" rIns="45719" bIns="45719"/>
+          <a:bodyPr lIns="45718" tIns="45718" rIns="45718" bIns="45718" numCol="1" spcCol="38100"/>
           <a:lstStyle>
             <a:lvl1pPr marL="0" indent="0" defTabSz="825500">
               <a:lnSpc>
@@ -2788,11 +2896,71 @@
               <a:buNone/>
               <a:defRPr b="1" sz="5500"/>
             </a:lvl1pPr>
+            <a:lvl2pPr marL="1308100" indent="-698500" defTabSz="825500">
+              <a:lnSpc>
+                <a:spcPct val="100000"/>
+              </a:lnSpc>
+              <a:spcBef>
+                <a:spcPts val="0"/>
+              </a:spcBef>
+              <a:defRPr b="1" sz="5500"/>
+            </a:lvl2pPr>
+            <a:lvl3pPr marL="1917700" indent="-698500" defTabSz="825500">
+              <a:lnSpc>
+                <a:spcPct val="100000"/>
+              </a:lnSpc>
+              <a:spcBef>
+                <a:spcPts val="0"/>
+              </a:spcBef>
+              <a:defRPr b="1" sz="5500"/>
+            </a:lvl3pPr>
+            <a:lvl4pPr marL="2527300" indent="-698500" defTabSz="825500">
+              <a:lnSpc>
+                <a:spcPct val="100000"/>
+              </a:lnSpc>
+              <a:spcBef>
+                <a:spcPts val="0"/>
+              </a:spcBef>
+              <a:defRPr b="1" sz="5500"/>
+            </a:lvl4pPr>
+            <a:lvl5pPr marL="3136900" indent="-698500" defTabSz="825500">
+              <a:lnSpc>
+                <a:spcPct val="100000"/>
+              </a:lnSpc>
+              <a:spcBef>
+                <a:spcPts val="0"/>
+              </a:spcBef>
+              <a:defRPr b="1" sz="5500"/>
+            </a:lvl5pPr>
           </a:lstStyle>
           <a:p>
             <a:pPr/>
             <a:r>
               <a:t>Agenda Subtitle</a:t>
+            </a:r>
+          </a:p>
+          <a:p>
+            <a:pPr lvl="1"/>
+            <a:r>
+              <a:t/>
+            </a:r>
+          </a:p>
+          <a:p>
+            <a:pPr lvl="2"/>
+            <a:r>
+              <a:t/>
+            </a:r>
+          </a:p>
+          <a:p>
+            <a:pPr lvl="3"/>
+            <a:r>
+              <a:t/>
+            </a:r>
+          </a:p>
+          <a:p>
+            <a:pPr lvl="4"/>
+            <a:r>
+              <a:t/>
             </a:r>
           </a:p>
         </p:txBody>
@@ -2802,16 +2970,20 @@
           <p:cNvPr id="90" name="Body Level One…"/>
           <p:cNvSpPr txBox="1"/>
           <p:nvPr>
-            <p:ph type="body" idx="1" hasCustomPrompt="1"/>
+            <p:ph type="body" idx="21" hasCustomPrompt="1"/>
           </p:nvPr>
         </p:nvSpPr>
         <p:spPr>
+          <a:xfrm>
+            <a:off x="1206500" y="4248503"/>
+            <a:ext cx="21971000" cy="8256014"/>
+          </a:xfrm>
           <a:prstGeom prst="rect">
             <a:avLst/>
           </a:prstGeom>
         </p:spPr>
         <p:txBody>
-          <a:bodyPr/>
+          <a:bodyPr numCol="1" spcCol="38100"/>
           <a:lstStyle>
             <a:lvl1pPr marL="0" indent="0" defTabSz="825500">
               <a:lnSpc>
@@ -2822,81 +2994,13 @@
               </a:spcBef>
               <a:buSzTx/>
               <a:buNone/>
-              <a:defRPr spc="-55" sz="5500"/>
+              <a:defRPr spc="-99" sz="5500"/>
             </a:lvl1pPr>
-            <a:lvl2pPr marL="0" indent="457200" defTabSz="825500">
-              <a:lnSpc>
-                <a:spcPct val="100000"/>
-              </a:lnSpc>
-              <a:spcBef>
-                <a:spcPts val="1800"/>
-              </a:spcBef>
-              <a:buSzTx/>
-              <a:buNone/>
-              <a:defRPr spc="-55" sz="5500"/>
-            </a:lvl2pPr>
-            <a:lvl3pPr marL="0" indent="914400" defTabSz="825500">
-              <a:lnSpc>
-                <a:spcPct val="100000"/>
-              </a:lnSpc>
-              <a:spcBef>
-                <a:spcPts val="1800"/>
-              </a:spcBef>
-              <a:buSzTx/>
-              <a:buNone/>
-              <a:defRPr spc="-55" sz="5500"/>
-            </a:lvl3pPr>
-            <a:lvl4pPr marL="0" indent="1371600" defTabSz="825500">
-              <a:lnSpc>
-                <a:spcPct val="100000"/>
-              </a:lnSpc>
-              <a:spcBef>
-                <a:spcPts val="1800"/>
-              </a:spcBef>
-              <a:buSzTx/>
-              <a:buNone/>
-              <a:defRPr spc="-55" sz="5500"/>
-            </a:lvl4pPr>
-            <a:lvl5pPr marL="0" indent="1828800" defTabSz="825500">
-              <a:lnSpc>
-                <a:spcPct val="100000"/>
-              </a:lnSpc>
-              <a:spcBef>
-                <a:spcPts val="1800"/>
-              </a:spcBef>
-              <a:buSzTx/>
-              <a:buNone/>
-              <a:defRPr spc="-55" sz="5500"/>
-            </a:lvl5pPr>
           </a:lstStyle>
           <a:p>
             <a:pPr/>
             <a:r>
               <a:t>Agenda Topics</a:t>
-            </a:r>
-          </a:p>
-          <a:p>
-            <a:pPr lvl="1"/>
-            <a:r>
-              <a:t/>
-            </a:r>
-          </a:p>
-          <a:p>
-            <a:pPr lvl="2"/>
-            <a:r>
-              <a:t/>
-            </a:r>
-          </a:p>
-          <a:p>
-            <a:pPr lvl="3"/>
-            <a:r>
-              <a:t/>
-            </a:r>
-          </a:p>
-          <a:p>
-            <a:pPr lvl="4"/>
-            <a:r>
-              <a:t/>
             </a:r>
           </a:p>
         </p:txBody>
@@ -2962,16 +3066,78 @@
       </p:grpSpPr>
       <p:sp>
         <p:nvSpPr>
-          <p:cNvPr id="2" name="Slide Title"/>
+          <p:cNvPr id="2" name="Body Level One…"/>
           <p:cNvSpPr txBox="1"/>
           <p:nvPr>
-            <p:ph type="title" hasCustomPrompt="1"/>
+            <p:ph type="body" idx="1" hasCustomPrompt="1"/>
           </p:nvPr>
         </p:nvSpPr>
         <p:spPr>
           <a:xfrm>
-            <a:off x="1206500" y="1079500"/>
-            <a:ext cx="21971000" cy="1433163"/>
+            <a:off x="1206500" y="4248503"/>
+            <a:ext cx="21971000" cy="8256014"/>
+          </a:xfrm>
+          <a:prstGeom prst="rect">
+            <a:avLst/>
+          </a:prstGeom>
+          <a:ln w="12700">
+            <a:miter lim="400000"/>
+          </a:ln>
+          <a:extLst>
+            <a:ext uri="{C572A759-6A51-4108-AA02-DFA0A04FC94B}">
+              <ma14:wrappingTextBoxFlag xmlns:ma14="http://schemas.microsoft.com/office/mac/drawingml/2011/main" val="1"/>
+            </a:ext>
+          </a:extLst>
+        </p:spPr>
+        <p:txBody>
+          <a:bodyPr lIns="50800" tIns="50800" rIns="50800" bIns="50800" numCol="2" spcCol="1098550">
+            <a:normAutofit fontScale="100000" lnSpcReduction="0"/>
+          </a:bodyPr>
+          <a:lstStyle/>
+          <a:p>
+            <a:pPr/>
+            <a:r>
+              <a:t>Slide bullet text</a:t>
+            </a:r>
+          </a:p>
+          <a:p>
+            <a:pPr lvl="1"/>
+            <a:r>
+              <a:t/>
+            </a:r>
+          </a:p>
+          <a:p>
+            <a:pPr lvl="2"/>
+            <a:r>
+              <a:t/>
+            </a:r>
+          </a:p>
+          <a:p>
+            <a:pPr lvl="3"/>
+            <a:r>
+              <a:t/>
+            </a:r>
+          </a:p>
+          <a:p>
+            <a:pPr lvl="4"/>
+            <a:r>
+              <a:t/>
+            </a:r>
+          </a:p>
+        </p:txBody>
+      </p:sp>
+      <p:sp>
+        <p:nvSpPr>
+          <p:cNvPr id="3" name="Title Text"/>
+          <p:cNvSpPr txBox="1"/>
+          <p:nvPr>
+            <p:ph type="title"/>
+          </p:nvPr>
+        </p:nvSpPr>
+        <p:spPr>
+          <a:xfrm>
+            <a:off x="3653366" y="2743200"/>
+            <a:ext cx="19507201" cy="1505304"/>
           </a:xfrm>
           <a:prstGeom prst="rect">
             <a:avLst/>
@@ -2993,69 +3159,7 @@
           <a:p>
             <a:pPr/>
             <a:r>
-              <a:t>Slide Title</a:t>
-            </a:r>
-          </a:p>
-        </p:txBody>
-      </p:sp>
-      <p:sp>
-        <p:nvSpPr>
-          <p:cNvPr id="3" name="Body Level One…"/>
-          <p:cNvSpPr txBox="1"/>
-          <p:nvPr>
-            <p:ph type="body" idx="1" hasCustomPrompt="1"/>
-          </p:nvPr>
-        </p:nvSpPr>
-        <p:spPr>
-          <a:xfrm>
-            <a:off x="1206500" y="4248504"/>
-            <a:ext cx="21971000" cy="8256012"/>
-          </a:xfrm>
-          <a:prstGeom prst="rect">
-            <a:avLst/>
-          </a:prstGeom>
-          <a:ln w="12700">
-            <a:miter lim="400000"/>
-          </a:ln>
-          <a:extLst>
-            <a:ext uri="{C572A759-6A51-4108-AA02-DFA0A04FC94B}">
-              <ma14:wrappingTextBoxFlag xmlns:ma14="http://schemas.microsoft.com/office/mac/drawingml/2011/main" val="1"/>
-            </a:ext>
-          </a:extLst>
-        </p:spPr>
-        <p:txBody>
-          <a:bodyPr lIns="50800" tIns="50800" rIns="50800" bIns="50800">
-            <a:normAutofit fontScale="100000" lnSpcReduction="0"/>
-          </a:bodyPr>
-          <a:lstStyle/>
-          <a:p>
-            <a:pPr/>
-            <a:r>
-              <a:t>Slide bullet text</a:t>
-            </a:r>
-          </a:p>
-          <a:p>
-            <a:pPr lvl="1"/>
-            <a:r>
-              <a:t/>
-            </a:r>
-          </a:p>
-          <a:p>
-            <a:pPr lvl="2"/>
-            <a:r>
-              <a:t/>
-            </a:r>
-          </a:p>
-          <a:p>
-            <a:pPr lvl="3"/>
-            <a:r>
-              <a:t/>
-            </a:r>
-          </a:p>
-          <a:p>
-            <a:pPr lvl="4"/>
-            <a:r>
-              <a:t/>
+              <a:t>Title Text</a:t>
             </a:r>
           </a:p>
         </p:txBody>
@@ -3070,8 +3174,8 @@
         </p:nvSpPr>
         <p:spPr>
           <a:xfrm>
-            <a:off x="12001499" y="13080999"/>
-            <a:ext cx="368505" cy="374600"/>
+            <a:off x="12001500" y="13080999"/>
+            <a:ext cx="368504" cy="374600"/>
           </a:xfrm>
           <a:prstGeom prst="rect">
             <a:avLst/>
@@ -3122,7 +3226,7 @@
   <p:transition xmlns:p14="http://schemas.microsoft.com/office/powerpoint/2010/main" spd="med" advClick="1"/>
   <p:txStyles>
     <p:titleStyle>
-      <a:lvl1pPr marL="0" marR="0" indent="0" algn="l" defTabSz="2438338" rtl="0" latinLnBrk="0">
+      <a:lvl1pPr marL="0" marR="0" indent="0" algn="l" defTabSz="2438337" rtl="0" latinLnBrk="0">
         <a:lnSpc>
           <a:spcPct val="80000"/>
         </a:lnSpc>
@@ -3142,13 +3246,13 @@
             <a:srgbClr val="000000"/>
           </a:solidFill>
           <a:uFillTx/>
-          <a:latin typeface="+mn-lt"/>
-          <a:ea typeface="+mn-ea"/>
-          <a:cs typeface="+mn-cs"/>
+          <a:latin typeface="+mj-lt"/>
+          <a:ea typeface="+mj-ea"/>
+          <a:cs typeface="+mj-cs"/>
           <a:sym typeface="Helvetica Neue"/>
         </a:defRPr>
       </a:lvl1pPr>
-      <a:lvl2pPr marL="0" marR="0" indent="457200" algn="l" defTabSz="2438338" rtl="0" latinLnBrk="0">
+      <a:lvl2pPr marL="0" marR="0" indent="0" algn="l" defTabSz="2438337" rtl="0" latinLnBrk="0">
         <a:lnSpc>
           <a:spcPct val="80000"/>
         </a:lnSpc>
@@ -3168,13 +3272,13 @@
             <a:srgbClr val="000000"/>
           </a:solidFill>
           <a:uFillTx/>
-          <a:latin typeface="+mn-lt"/>
-          <a:ea typeface="+mn-ea"/>
-          <a:cs typeface="+mn-cs"/>
+          <a:latin typeface="+mj-lt"/>
+          <a:ea typeface="+mj-ea"/>
+          <a:cs typeface="+mj-cs"/>
           <a:sym typeface="Helvetica Neue"/>
         </a:defRPr>
       </a:lvl2pPr>
-      <a:lvl3pPr marL="0" marR="0" indent="914400" algn="l" defTabSz="2438338" rtl="0" latinLnBrk="0">
+      <a:lvl3pPr marL="0" marR="0" indent="0" algn="l" defTabSz="2438337" rtl="0" latinLnBrk="0">
         <a:lnSpc>
           <a:spcPct val="80000"/>
         </a:lnSpc>
@@ -3194,13 +3298,13 @@
             <a:srgbClr val="000000"/>
           </a:solidFill>
           <a:uFillTx/>
-          <a:latin typeface="+mn-lt"/>
-          <a:ea typeface="+mn-ea"/>
-          <a:cs typeface="+mn-cs"/>
+          <a:latin typeface="+mj-lt"/>
+          <a:ea typeface="+mj-ea"/>
+          <a:cs typeface="+mj-cs"/>
           <a:sym typeface="Helvetica Neue"/>
         </a:defRPr>
       </a:lvl3pPr>
-      <a:lvl4pPr marL="0" marR="0" indent="1371600" algn="l" defTabSz="2438338" rtl="0" latinLnBrk="0">
+      <a:lvl4pPr marL="0" marR="0" indent="0" algn="l" defTabSz="2438337" rtl="0" latinLnBrk="0">
         <a:lnSpc>
           <a:spcPct val="80000"/>
         </a:lnSpc>
@@ -3220,13 +3324,13 @@
             <a:srgbClr val="000000"/>
           </a:solidFill>
           <a:uFillTx/>
-          <a:latin typeface="+mn-lt"/>
-          <a:ea typeface="+mn-ea"/>
-          <a:cs typeface="+mn-cs"/>
+          <a:latin typeface="+mj-lt"/>
+          <a:ea typeface="+mj-ea"/>
+          <a:cs typeface="+mj-cs"/>
           <a:sym typeface="Helvetica Neue"/>
         </a:defRPr>
       </a:lvl4pPr>
-      <a:lvl5pPr marL="0" marR="0" indent="1828800" algn="l" defTabSz="2438338" rtl="0" latinLnBrk="0">
+      <a:lvl5pPr marL="0" marR="0" indent="0" algn="l" defTabSz="2438337" rtl="0" latinLnBrk="0">
         <a:lnSpc>
           <a:spcPct val="80000"/>
         </a:lnSpc>
@@ -3246,13 +3350,13 @@
             <a:srgbClr val="000000"/>
           </a:solidFill>
           <a:uFillTx/>
-          <a:latin typeface="+mn-lt"/>
-          <a:ea typeface="+mn-ea"/>
-          <a:cs typeface="+mn-cs"/>
+          <a:latin typeface="+mj-lt"/>
+          <a:ea typeface="+mj-ea"/>
+          <a:cs typeface="+mj-cs"/>
           <a:sym typeface="Helvetica Neue"/>
         </a:defRPr>
       </a:lvl5pPr>
-      <a:lvl6pPr marL="0" marR="0" indent="2286000" algn="l" defTabSz="2438338" rtl="0" latinLnBrk="0">
+      <a:lvl6pPr marL="0" marR="0" indent="0" algn="l" defTabSz="2438337" rtl="0" latinLnBrk="0">
         <a:lnSpc>
           <a:spcPct val="80000"/>
         </a:lnSpc>
@@ -3272,13 +3376,13 @@
             <a:srgbClr val="000000"/>
           </a:solidFill>
           <a:uFillTx/>
-          <a:latin typeface="+mn-lt"/>
-          <a:ea typeface="+mn-ea"/>
-          <a:cs typeface="+mn-cs"/>
+          <a:latin typeface="+mj-lt"/>
+          <a:ea typeface="+mj-ea"/>
+          <a:cs typeface="+mj-cs"/>
           <a:sym typeface="Helvetica Neue"/>
         </a:defRPr>
       </a:lvl6pPr>
-      <a:lvl7pPr marL="0" marR="0" indent="2743200" algn="l" defTabSz="2438338" rtl="0" latinLnBrk="0">
+      <a:lvl7pPr marL="0" marR="0" indent="0" algn="l" defTabSz="2438337" rtl="0" latinLnBrk="0">
         <a:lnSpc>
           <a:spcPct val="80000"/>
         </a:lnSpc>
@@ -3298,13 +3402,13 @@
             <a:srgbClr val="000000"/>
           </a:solidFill>
           <a:uFillTx/>
-          <a:latin typeface="+mn-lt"/>
-          <a:ea typeface="+mn-ea"/>
-          <a:cs typeface="+mn-cs"/>
+          <a:latin typeface="+mj-lt"/>
+          <a:ea typeface="+mj-ea"/>
+          <a:cs typeface="+mj-cs"/>
           <a:sym typeface="Helvetica Neue"/>
         </a:defRPr>
       </a:lvl7pPr>
-      <a:lvl8pPr marL="0" marR="0" indent="3200400" algn="l" defTabSz="2438338" rtl="0" latinLnBrk="0">
+      <a:lvl8pPr marL="0" marR="0" indent="0" algn="l" defTabSz="2438337" rtl="0" latinLnBrk="0">
         <a:lnSpc>
           <a:spcPct val="80000"/>
         </a:lnSpc>
@@ -3324,13 +3428,13 @@
             <a:srgbClr val="000000"/>
           </a:solidFill>
           <a:uFillTx/>
-          <a:latin typeface="+mn-lt"/>
-          <a:ea typeface="+mn-ea"/>
-          <a:cs typeface="+mn-cs"/>
+          <a:latin typeface="+mj-lt"/>
+          <a:ea typeface="+mj-ea"/>
+          <a:cs typeface="+mj-cs"/>
           <a:sym typeface="Helvetica Neue"/>
         </a:defRPr>
       </a:lvl8pPr>
-      <a:lvl9pPr marL="0" marR="0" indent="3657600" algn="l" defTabSz="2438338" rtl="0" latinLnBrk="0">
+      <a:lvl9pPr marL="0" marR="0" indent="0" algn="l" defTabSz="2438337" rtl="0" latinLnBrk="0">
         <a:lnSpc>
           <a:spcPct val="80000"/>
         </a:lnSpc>
@@ -3350,15 +3454,15 @@
             <a:srgbClr val="000000"/>
           </a:solidFill>
           <a:uFillTx/>
-          <a:latin typeface="+mn-lt"/>
-          <a:ea typeface="+mn-ea"/>
-          <a:cs typeface="+mn-cs"/>
+          <a:latin typeface="+mj-lt"/>
+          <a:ea typeface="+mj-ea"/>
+          <a:cs typeface="+mj-cs"/>
           <a:sym typeface="Helvetica Neue"/>
         </a:defRPr>
       </a:lvl9pPr>
     </p:titleStyle>
     <p:bodyStyle>
-      <a:lvl1pPr marL="609600" marR="0" indent="-609600" algn="l" defTabSz="2438338" rtl="0" latinLnBrk="0">
+      <a:lvl1pPr marL="609600" marR="0" indent="-609600" algn="l" defTabSz="2438337" rtl="0" latinLnBrk="0">
         <a:lnSpc>
           <a:spcPct val="90000"/>
         </a:lnSpc>
@@ -3378,13 +3482,13 @@
             <a:srgbClr val="000000"/>
           </a:solidFill>
           <a:uFillTx/>
-          <a:latin typeface="+mn-lt"/>
-          <a:ea typeface="+mn-ea"/>
-          <a:cs typeface="+mn-cs"/>
+          <a:latin typeface="+mj-lt"/>
+          <a:ea typeface="+mj-ea"/>
+          <a:cs typeface="+mj-cs"/>
           <a:sym typeface="Helvetica Neue"/>
         </a:defRPr>
       </a:lvl1pPr>
-      <a:lvl2pPr marL="1219200" marR="0" indent="-609600" algn="l" defTabSz="2438338" rtl="0" latinLnBrk="0">
+      <a:lvl2pPr marL="1219200" marR="0" indent="-609600" algn="l" defTabSz="2438337" rtl="0" latinLnBrk="0">
         <a:lnSpc>
           <a:spcPct val="90000"/>
         </a:lnSpc>
@@ -3404,13 +3508,13 @@
             <a:srgbClr val="000000"/>
           </a:solidFill>
           <a:uFillTx/>
-          <a:latin typeface="+mn-lt"/>
-          <a:ea typeface="+mn-ea"/>
-          <a:cs typeface="+mn-cs"/>
+          <a:latin typeface="+mj-lt"/>
+          <a:ea typeface="+mj-ea"/>
+          <a:cs typeface="+mj-cs"/>
           <a:sym typeface="Helvetica Neue"/>
         </a:defRPr>
       </a:lvl2pPr>
-      <a:lvl3pPr marL="1828800" marR="0" indent="-609600" algn="l" defTabSz="2438338" rtl="0" latinLnBrk="0">
+      <a:lvl3pPr marL="1828800" marR="0" indent="-609600" algn="l" defTabSz="2438337" rtl="0" latinLnBrk="0">
         <a:lnSpc>
           <a:spcPct val="90000"/>
         </a:lnSpc>
@@ -3430,13 +3534,13 @@
             <a:srgbClr val="000000"/>
           </a:solidFill>
           <a:uFillTx/>
-          <a:latin typeface="+mn-lt"/>
-          <a:ea typeface="+mn-ea"/>
-          <a:cs typeface="+mn-cs"/>
+          <a:latin typeface="+mj-lt"/>
+          <a:ea typeface="+mj-ea"/>
+          <a:cs typeface="+mj-cs"/>
           <a:sym typeface="Helvetica Neue"/>
         </a:defRPr>
       </a:lvl3pPr>
-      <a:lvl4pPr marL="2438400" marR="0" indent="-609600" algn="l" defTabSz="2438338" rtl="0" latinLnBrk="0">
+      <a:lvl4pPr marL="2438400" marR="0" indent="-609600" algn="l" defTabSz="2438337" rtl="0" latinLnBrk="0">
         <a:lnSpc>
           <a:spcPct val="90000"/>
         </a:lnSpc>
@@ -3456,13 +3560,13 @@
             <a:srgbClr val="000000"/>
           </a:solidFill>
           <a:uFillTx/>
-          <a:latin typeface="+mn-lt"/>
-          <a:ea typeface="+mn-ea"/>
-          <a:cs typeface="+mn-cs"/>
+          <a:latin typeface="+mj-lt"/>
+          <a:ea typeface="+mj-ea"/>
+          <a:cs typeface="+mj-cs"/>
           <a:sym typeface="Helvetica Neue"/>
         </a:defRPr>
       </a:lvl4pPr>
-      <a:lvl5pPr marL="3048000" marR="0" indent="-609600" algn="l" defTabSz="2438338" rtl="0" latinLnBrk="0">
+      <a:lvl5pPr marL="3048000" marR="0" indent="-609600" algn="l" defTabSz="2438337" rtl="0" latinLnBrk="0">
         <a:lnSpc>
           <a:spcPct val="90000"/>
         </a:lnSpc>
@@ -3482,13 +3586,13 @@
             <a:srgbClr val="000000"/>
           </a:solidFill>
           <a:uFillTx/>
-          <a:latin typeface="+mn-lt"/>
-          <a:ea typeface="+mn-ea"/>
-          <a:cs typeface="+mn-cs"/>
+          <a:latin typeface="+mj-lt"/>
+          <a:ea typeface="+mj-ea"/>
+          <a:cs typeface="+mj-cs"/>
           <a:sym typeface="Helvetica Neue"/>
         </a:defRPr>
       </a:lvl5pPr>
-      <a:lvl6pPr marL="3657600" marR="0" indent="-609600" algn="l" defTabSz="2438338" rtl="0" latinLnBrk="0">
+      <a:lvl6pPr marL="3657600" marR="0" indent="-609600" algn="l" defTabSz="2438337" rtl="0" latinLnBrk="0">
         <a:lnSpc>
           <a:spcPct val="90000"/>
         </a:lnSpc>
@@ -3508,13 +3612,13 @@
             <a:srgbClr val="000000"/>
           </a:solidFill>
           <a:uFillTx/>
-          <a:latin typeface="+mn-lt"/>
-          <a:ea typeface="+mn-ea"/>
-          <a:cs typeface="+mn-cs"/>
+          <a:latin typeface="+mj-lt"/>
+          <a:ea typeface="+mj-ea"/>
+          <a:cs typeface="+mj-cs"/>
           <a:sym typeface="Helvetica Neue"/>
         </a:defRPr>
       </a:lvl6pPr>
-      <a:lvl7pPr marL="4267200" marR="0" indent="-609600" algn="l" defTabSz="2438338" rtl="0" latinLnBrk="0">
+      <a:lvl7pPr marL="4267200" marR="0" indent="-609600" algn="l" defTabSz="2438337" rtl="0" latinLnBrk="0">
         <a:lnSpc>
           <a:spcPct val="90000"/>
         </a:lnSpc>
@@ -3534,13 +3638,13 @@
             <a:srgbClr val="000000"/>
           </a:solidFill>
           <a:uFillTx/>
-          <a:latin typeface="+mn-lt"/>
-          <a:ea typeface="+mn-ea"/>
-          <a:cs typeface="+mn-cs"/>
+          <a:latin typeface="+mj-lt"/>
+          <a:ea typeface="+mj-ea"/>
+          <a:cs typeface="+mj-cs"/>
           <a:sym typeface="Helvetica Neue"/>
         </a:defRPr>
       </a:lvl7pPr>
-      <a:lvl8pPr marL="4876800" marR="0" indent="-609600" algn="l" defTabSz="2438338" rtl="0" latinLnBrk="0">
+      <a:lvl8pPr marL="4876800" marR="0" indent="-609600" algn="l" defTabSz="2438337" rtl="0" latinLnBrk="0">
         <a:lnSpc>
           <a:spcPct val="90000"/>
         </a:lnSpc>
@@ -3560,13 +3664,13 @@
             <a:srgbClr val="000000"/>
           </a:solidFill>
           <a:uFillTx/>
-          <a:latin typeface="+mn-lt"/>
-          <a:ea typeface="+mn-ea"/>
-          <a:cs typeface="+mn-cs"/>
+          <a:latin typeface="+mj-lt"/>
+          <a:ea typeface="+mj-ea"/>
+          <a:cs typeface="+mj-cs"/>
           <a:sym typeface="Helvetica Neue"/>
         </a:defRPr>
       </a:lvl8pPr>
-      <a:lvl9pPr marL="5486400" marR="0" indent="-609600" algn="l" defTabSz="2438338" rtl="0" latinLnBrk="0">
+      <a:lvl9pPr marL="5486400" marR="0" indent="-609600" algn="l" defTabSz="2438337" rtl="0" latinLnBrk="0">
         <a:lnSpc>
           <a:spcPct val="90000"/>
         </a:lnSpc>
@@ -3586,9 +3690,9 @@
             <a:srgbClr val="000000"/>
           </a:solidFill>
           <a:uFillTx/>
-          <a:latin typeface="+mn-lt"/>
-          <a:ea typeface="+mn-ea"/>
-          <a:cs typeface="+mn-cs"/>
+          <a:latin typeface="+mj-lt"/>
+          <a:ea typeface="+mj-ea"/>
+          <a:cs typeface="+mj-cs"/>
           <a:sym typeface="Helvetica Neue"/>
         </a:defRPr>
       </a:lvl9pPr>
@@ -3620,7 +3724,7 @@
           <a:sym typeface="Helvetica Neue"/>
         </a:defRPr>
       </a:lvl1pPr>
-      <a:lvl2pPr marL="0" marR="0" indent="457200" algn="ctr" defTabSz="584200" rtl="0" latinLnBrk="0">
+      <a:lvl2pPr marL="0" marR="0" indent="0" algn="ctr" defTabSz="584200" rtl="0" latinLnBrk="0">
         <a:lnSpc>
           <a:spcPct val="100000"/>
         </a:lnSpc>
@@ -3646,7 +3750,7 @@
           <a:sym typeface="Helvetica Neue"/>
         </a:defRPr>
       </a:lvl2pPr>
-      <a:lvl3pPr marL="0" marR="0" indent="914400" algn="ctr" defTabSz="584200" rtl="0" latinLnBrk="0">
+      <a:lvl3pPr marL="0" marR="0" indent="0" algn="ctr" defTabSz="584200" rtl="0" latinLnBrk="0">
         <a:lnSpc>
           <a:spcPct val="100000"/>
         </a:lnSpc>
@@ -3672,7 +3776,7 @@
           <a:sym typeface="Helvetica Neue"/>
         </a:defRPr>
       </a:lvl3pPr>
-      <a:lvl4pPr marL="0" marR="0" indent="1371600" algn="ctr" defTabSz="584200" rtl="0" latinLnBrk="0">
+      <a:lvl4pPr marL="0" marR="0" indent="0" algn="ctr" defTabSz="584200" rtl="0" latinLnBrk="0">
         <a:lnSpc>
           <a:spcPct val="100000"/>
         </a:lnSpc>
@@ -3698,7 +3802,7 @@
           <a:sym typeface="Helvetica Neue"/>
         </a:defRPr>
       </a:lvl4pPr>
-      <a:lvl5pPr marL="0" marR="0" indent="1828800" algn="ctr" defTabSz="584200" rtl="0" latinLnBrk="0">
+      <a:lvl5pPr marL="0" marR="0" indent="0" algn="ctr" defTabSz="584200" rtl="0" latinLnBrk="0">
         <a:lnSpc>
           <a:spcPct val="100000"/>
         </a:lnSpc>
@@ -3724,7 +3828,7 @@
           <a:sym typeface="Helvetica Neue"/>
         </a:defRPr>
       </a:lvl5pPr>
-      <a:lvl6pPr marL="0" marR="0" indent="2286000" algn="ctr" defTabSz="584200" rtl="0" latinLnBrk="0">
+      <a:lvl6pPr marL="0" marR="0" indent="0" algn="ctr" defTabSz="584200" rtl="0" latinLnBrk="0">
         <a:lnSpc>
           <a:spcPct val="100000"/>
         </a:lnSpc>
@@ -3750,7 +3854,7 @@
           <a:sym typeface="Helvetica Neue"/>
         </a:defRPr>
       </a:lvl6pPr>
-      <a:lvl7pPr marL="0" marR="0" indent="2743200" algn="ctr" defTabSz="584200" rtl="0" latinLnBrk="0">
+      <a:lvl7pPr marL="0" marR="0" indent="0" algn="ctr" defTabSz="584200" rtl="0" latinLnBrk="0">
         <a:lnSpc>
           <a:spcPct val="100000"/>
         </a:lnSpc>
@@ -3776,7 +3880,7 @@
           <a:sym typeface="Helvetica Neue"/>
         </a:defRPr>
       </a:lvl7pPr>
-      <a:lvl8pPr marL="0" marR="0" indent="3200400" algn="ctr" defTabSz="584200" rtl="0" latinLnBrk="0">
+      <a:lvl8pPr marL="0" marR="0" indent="0" algn="ctr" defTabSz="584200" rtl="0" latinLnBrk="0">
         <a:lnSpc>
           <a:spcPct val="100000"/>
         </a:lnSpc>
@@ -3802,7 +3906,7 @@
           <a:sym typeface="Helvetica Neue"/>
         </a:defRPr>
       </a:lvl8pPr>
-      <a:lvl9pPr marL="0" marR="0" indent="3657600" algn="ctr" defTabSz="584200" rtl="0" latinLnBrk="0">
+      <a:lvl9pPr marL="0" marR="0" indent="0" algn="ctr" defTabSz="584200" rtl="0" latinLnBrk="0">
         <a:lnSpc>
           <a:spcPct val="100000"/>
         </a:lnSpc>
@@ -3855,18 +3959,17 @@
           <p:cNvPr id="151" name="M V GANESH"/>
           <p:cNvSpPr txBox="1"/>
           <p:nvPr>
-            <p:ph type="body" idx="21"/>
+            <p:ph type="body" sz="quarter" idx="1"/>
           </p:nvPr>
         </p:nvSpPr>
         <p:spPr>
+          <a:xfrm>
+            <a:off x="1201341" y="11859862"/>
+            <a:ext cx="21971002" cy="636980"/>
+          </a:xfrm>
           <a:prstGeom prst="rect">
             <a:avLst/>
           </a:prstGeom>
-          <a:extLst>
-            <a:ext uri="{C572A759-6A51-4108-AA02-DFA0A04FC94B}">
-              <ma14:wrappingTextBoxFlag xmlns:ma14="http://schemas.microsoft.com/office/mac/drawingml/2011/main" val="1"/>
-            </a:ext>
-          </a:extLst>
         </p:spPr>
         <p:txBody>
           <a:bodyPr/>
@@ -3884,10 +3987,14 @@
           <p:cNvPr id="152" name="BlinkIT Grocery Sales Analysis Dashboard"/>
           <p:cNvSpPr txBox="1"/>
           <p:nvPr>
-            <p:ph type="ctrTitle"/>
+            <p:ph type="title"/>
           </p:nvPr>
         </p:nvSpPr>
         <p:spPr>
+          <a:xfrm>
+            <a:off x="1206495" y="2574990"/>
+            <a:ext cx="21971006" cy="4648203"/>
+          </a:xfrm>
           <a:prstGeom prst="rect">
             <a:avLst/>
           </a:prstGeom>
@@ -3919,18 +4026,38 @@
         <p:nvSpPr>
           <p:cNvPr id="153" name="POWER BI"/>
           <p:cNvSpPr txBox="1"/>
-          <p:nvPr>
-            <p:ph type="subTitle" sz="quarter" idx="1"/>
-          </p:nvPr>
+          <p:nvPr/>
         </p:nvSpPr>
         <p:spPr>
+          <a:xfrm>
+            <a:off x="1201342" y="7223190"/>
+            <a:ext cx="21971002" cy="1905002"/>
+          </a:xfrm>
           <a:prstGeom prst="rect">
             <a:avLst/>
           </a:prstGeom>
+          <a:ln w="12700">
+            <a:miter lim="400000"/>
+          </a:ln>
+          <a:extLst>
+            <a:ext uri="{C572A759-6A51-4108-AA02-DFA0A04FC94B}">
+              <ma14:wrappingTextBoxFlag xmlns:ma14="http://schemas.microsoft.com/office/mac/drawingml/2011/main" val="1"/>
+            </a:ext>
+          </a:extLst>
         </p:spPr>
         <p:txBody>
-          <a:bodyPr/>
-          <a:lstStyle/>
+          <a:bodyPr lIns="50800" tIns="50800" rIns="50800" bIns="50800">
+            <a:normAutofit fontScale="100000" lnSpcReduction="0"/>
+          </a:bodyPr>
+          <a:lstStyle>
+            <a:lvl1pPr algn="l" defTabSz="825500">
+              <a:defRPr b="1" sz="5500">
+                <a:solidFill>
+                  <a:srgbClr val="000000"/>
+                </a:solidFill>
+              </a:defRPr>
+            </a:lvl1pPr>
+          </a:lstStyle>
           <a:p>
             <a:pPr/>
             <a:r>
@@ -3974,13 +4101,21 @@
           </p:nvPr>
         </p:nvSpPr>
         <p:spPr>
+          <a:xfrm>
+            <a:off x="1206500" y="1079499"/>
+            <a:ext cx="21971000" cy="1433165"/>
+          </a:xfrm>
           <a:prstGeom prst="rect">
             <a:avLst/>
           </a:prstGeom>
         </p:spPr>
         <p:txBody>
           <a:bodyPr/>
-          <a:lstStyle/>
+          <a:lstStyle>
+            <a:lvl1pPr>
+              <a:defRPr spc="-200"/>
+            </a:lvl1pPr>
+          </a:lstStyle>
           <a:p>
             <a:pPr/>
             <a:r>
@@ -3999,44 +4134,21 @@
         </p:nvSpPr>
         <p:spPr>
           <a:xfrm>
-            <a:off x="1206500" y="3494391"/>
-            <a:ext cx="21971001" cy="8256012"/>
+            <a:off x="1206500" y="3494390"/>
+            <a:ext cx="21971002" cy="8256014"/>
           </a:xfrm>
           <a:prstGeom prst="rect">
             <a:avLst/>
           </a:prstGeom>
         </p:spPr>
         <p:txBody>
-          <a:bodyPr/>
+          <a:bodyPr lIns="50800" tIns="50800" rIns="50800" bIns="50800"/>
           <a:lstStyle/>
           <a:p>
-            <a:pPr marL="0" indent="0" defTabSz="429768">
-              <a:lnSpc>
-                <a:spcPct val="100000"/>
-              </a:lnSpc>
+            <a:pPr defTabSz="429768">
               <a:spcBef>
                 <a:spcPts val="1400"/>
               </a:spcBef>
-              <a:buSzTx/>
-              <a:buNone/>
-              <a:defRPr b="1" sz="4700">
-                <a:latin typeface="Times Roman"/>
-                <a:ea typeface="Times Roman"/>
-                <a:cs typeface="Times Roman"/>
-                <a:sym typeface="Times Roman"/>
-              </a:defRPr>
-            </a:pPr>
-          </a:p>
-          <a:p>
-            <a:pPr marL="0" indent="0" defTabSz="429768">
-              <a:lnSpc>
-                <a:spcPct val="100000"/>
-              </a:lnSpc>
-              <a:spcBef>
-                <a:spcPts val="1100"/>
-              </a:spcBef>
-              <a:buSzTx/>
-              <a:buNone/>
               <a:defRPr sz="4700">
                 <a:latin typeface="Times Roman"/>
                 <a:ea typeface="Times Roman"/>
@@ -4046,35 +4158,24 @@
             </a:pPr>
           </a:p>
           <a:p>
-            <a:pPr marL="429768" indent="-298450" defTabSz="429768">
-              <a:lnSpc>
-                <a:spcPct val="100000"/>
-              </a:lnSpc>
+            <a:pPr defTabSz="429768">
               <a:spcBef>
-                <a:spcPts val="0"/>
+                <a:spcPts val="1100"/>
               </a:spcBef>
-              <a:buFont typeface="Times Roman"/>
-              <a:defRPr sz="4700">
+              <a:defRPr b="0" sz="4700">
                 <a:latin typeface="Times Roman"/>
                 <a:ea typeface="Times Roman"/>
                 <a:cs typeface="Times Roman"/>
                 <a:sym typeface="Times Roman"/>
               </a:defRPr>
             </a:pPr>
-            <a:r>
-              <a:t>Focus more on Tier 3 locations.</a:t>
-            </a:r>
           </a:p>
           <a:p>
             <a:pPr marL="429768" indent="-298450" defTabSz="429768">
-              <a:lnSpc>
-                <a:spcPct val="100000"/>
-              </a:lnSpc>
-              <a:spcBef>
-                <a:spcPts val="0"/>
-              </a:spcBef>
+              <a:buSzPct val="123000"/>
               <a:buFont typeface="Times Roman"/>
-              <a:defRPr sz="4700">
+              <a:buChar char="•"/>
+              <a:defRPr b="0" sz="4700">
                 <a:latin typeface="Times Roman"/>
                 <a:ea typeface="Times Roman"/>
                 <a:cs typeface="Times Roman"/>
@@ -4082,19 +4183,15 @@
               </a:defRPr>
             </a:pPr>
             <a:r>
-              <a:t>Increase stock of high-selling item categories.</a:t>
+              <a:t>Focus more on Tier 3 locations.</a:t>
             </a:r>
           </a:p>
           <a:p>
             <a:pPr marL="429768" indent="-298450" defTabSz="429768">
-              <a:lnSpc>
-                <a:spcPct val="100000"/>
-              </a:lnSpc>
-              <a:spcBef>
-                <a:spcPts val="0"/>
-              </a:spcBef>
+              <a:buSzPct val="123000"/>
               <a:buFont typeface="Times Roman"/>
-              <a:defRPr sz="4700">
+              <a:buChar char="•"/>
+              <a:defRPr b="0" sz="4700">
                 <a:latin typeface="Times Roman"/>
                 <a:ea typeface="Times Roman"/>
                 <a:cs typeface="Times Roman"/>
@@ -4102,19 +4199,15 @@
               </a:defRPr>
             </a:pPr>
             <a:r>
-              <a:t>Improve sales strategy for low-performing outlet types.</a:t>
+              <a:t>Increase stock of high-selling item categories.</a:t>
             </a:r>
           </a:p>
           <a:p>
             <a:pPr marL="429768" indent="-298450" defTabSz="429768">
-              <a:lnSpc>
-                <a:spcPct val="100000"/>
-              </a:lnSpc>
-              <a:spcBef>
-                <a:spcPts val="0"/>
-              </a:spcBef>
+              <a:buSzPct val="123000"/>
               <a:buFont typeface="Times Roman"/>
-              <a:defRPr sz="4700">
+              <a:buChar char="•"/>
+              <a:defRPr b="0" sz="4700">
                 <a:latin typeface="Times Roman"/>
                 <a:ea typeface="Times Roman"/>
                 <a:cs typeface="Times Roman"/>
@@ -4122,36 +4215,31 @@
               </a:defRPr>
             </a:pPr>
             <a:r>
-              <a:t>Use outlet-size analysis for better expansion planning.</a:t>
+              <a:t>Improve sales strategy for low-performing outlet types.</a:t>
             </a:r>
           </a:p>
           <a:p>
             <a:pPr marL="429768" indent="-298450" defTabSz="429768">
-              <a:lnSpc>
-                <a:spcPct val="100000"/>
-              </a:lnSpc>
-              <a:spcBef>
-                <a:spcPts val="0"/>
-              </a:spcBef>
+              <a:buSzPct val="123000"/>
               <a:buFont typeface="Times Roman"/>
-              <a:defRPr sz="4700">
+              <a:buChar char="•"/>
+              <a:defRPr b="0" sz="4700">
                 <a:latin typeface="Times Roman"/>
                 <a:ea typeface="Times Roman"/>
                 <a:cs typeface="Times Roman"/>
                 <a:sym typeface="Times Roman"/>
               </a:defRPr>
             </a:pPr>
+            <a:r>
+              <a:t>Use outlet-size analysis for better expansion planning.</a:t>
+            </a:r>
           </a:p>
           <a:p>
             <a:pPr marL="429768" indent="-298450" defTabSz="429768">
-              <a:lnSpc>
-                <a:spcPct val="100000"/>
-              </a:lnSpc>
-              <a:spcBef>
-                <a:spcPts val="0"/>
-              </a:spcBef>
+              <a:buSzPct val="123000"/>
               <a:buFont typeface="Times Roman"/>
-              <a:defRPr sz="4700">
+              <a:buChar char="•"/>
+              <a:defRPr b="0" sz="4700">
                 <a:latin typeface="Times Roman"/>
                 <a:ea typeface="Times Roman"/>
                 <a:cs typeface="Times Roman"/>
@@ -4160,16 +4248,21 @@
             </a:pPr>
           </a:p>
           <a:p>
-            <a:pPr marL="0" indent="0" defTabSz="429768">
-              <a:lnSpc>
-                <a:spcPct val="100000"/>
-              </a:lnSpc>
-              <a:spcBef>
-                <a:spcPts val="0"/>
-              </a:spcBef>
-              <a:buSzTx/>
-              <a:buNone/>
-              <a:defRPr sz="4700">
+            <a:pPr marL="429768" indent="-298450" defTabSz="429768">
+              <a:buSzPct val="123000"/>
+              <a:buFont typeface="Times Roman"/>
+              <a:buChar char="•"/>
+              <a:defRPr b="0" sz="4700">
+                <a:latin typeface="Times Roman"/>
+                <a:ea typeface="Times Roman"/>
+                <a:cs typeface="Times Roman"/>
+                <a:sym typeface="Times Roman"/>
+              </a:defRPr>
+            </a:pPr>
+          </a:p>
+          <a:p>
+            <a:pPr defTabSz="429768">
+              <a:defRPr b="0" sz="4700">
                 <a:latin typeface="Times Roman"/>
                 <a:ea typeface="Times Roman"/>
                 <a:cs typeface="Times Roman"/>
@@ -4218,8 +4311,8 @@
         </p:nvSpPr>
         <p:spPr>
           <a:xfrm>
-            <a:off x="4940132" y="5331839"/>
-            <a:ext cx="15251573" cy="4142374"/>
+            <a:off x="4940132" y="5331838"/>
+            <a:ext cx="15251574" cy="4142375"/>
           </a:xfrm>
           <a:prstGeom prst="rect">
             <a:avLst/>
@@ -4229,7 +4322,7 @@
           <a:bodyPr/>
           <a:lstStyle>
             <a:lvl1pPr defTabSz="999718">
-              <a:defRPr spc="-410" sz="20500"/>
+              <a:defRPr spc="-500" sz="20500"/>
             </a:lvl1pPr>
           </a:lstStyle>
           <a:p>
@@ -4276,27 +4369,22 @@
         </p:nvSpPr>
         <p:spPr>
           <a:xfrm>
-            <a:off x="1206500" y="3232504"/>
-            <a:ext cx="21971000" cy="8256012"/>
+            <a:off x="1206500" y="3232503"/>
+            <a:ext cx="21971000" cy="8256014"/>
           </a:xfrm>
           <a:prstGeom prst="rect">
             <a:avLst/>
           </a:prstGeom>
         </p:spPr>
         <p:txBody>
-          <a:bodyPr/>
+          <a:bodyPr lIns="50800" tIns="50800" rIns="50800" bIns="50800"/>
           <a:lstStyle/>
           <a:p>
-            <a:pPr marL="0" indent="0" defTabSz="457200">
-              <a:lnSpc>
-                <a:spcPct val="100000"/>
-              </a:lnSpc>
+            <a:pPr defTabSz="457200">
               <a:spcBef>
                 <a:spcPts val="1200"/>
               </a:spcBef>
-              <a:buSzTx/>
-              <a:buNone/>
-              <a:defRPr sz="5000">
+              <a:defRPr b="0" sz="5000">
                 <a:latin typeface="Times Roman"/>
                 <a:ea typeface="Times Roman"/>
                 <a:cs typeface="Times Roman"/>
@@ -4309,14 +4397,10 @@
           </a:p>
           <a:p>
             <a:pPr marL="457200" indent="-317500" defTabSz="457200">
-              <a:lnSpc>
-                <a:spcPct val="100000"/>
-              </a:lnSpc>
-              <a:spcBef>
-                <a:spcPts val="0"/>
-              </a:spcBef>
+              <a:buSzPct val="123000"/>
               <a:buFont typeface="Times Roman"/>
-              <a:defRPr sz="5000">
+              <a:buChar char="•"/>
+              <a:defRPr b="0" sz="5000">
                 <a:latin typeface="Times Roman"/>
                 <a:ea typeface="Times Roman"/>
                 <a:cs typeface="Times Roman"/>
@@ -4329,14 +4413,10 @@
           </a:p>
           <a:p>
             <a:pPr marL="457200" indent="-317500" defTabSz="457200">
-              <a:lnSpc>
-                <a:spcPct val="100000"/>
-              </a:lnSpc>
-              <a:spcBef>
-                <a:spcPts val="0"/>
-              </a:spcBef>
+              <a:buSzPct val="123000"/>
               <a:buFont typeface="Times Roman"/>
-              <a:defRPr sz="5000">
+              <a:buChar char="•"/>
+              <a:defRPr b="0" sz="5000">
                 <a:latin typeface="Times Roman"/>
                 <a:ea typeface="Times Roman"/>
                 <a:cs typeface="Times Roman"/>
@@ -4349,14 +4429,10 @@
           </a:p>
           <a:p>
             <a:pPr marL="457200" indent="-317500" defTabSz="457200">
-              <a:lnSpc>
-                <a:spcPct val="100000"/>
-              </a:lnSpc>
-              <a:spcBef>
-                <a:spcPts val="0"/>
-              </a:spcBef>
+              <a:buSzPct val="123000"/>
               <a:buFont typeface="Times Roman"/>
-              <a:defRPr sz="5000">
+              <a:buChar char="•"/>
+              <a:defRPr b="0" sz="5000">
                 <a:latin typeface="Times Roman"/>
                 <a:ea typeface="Times Roman"/>
                 <a:cs typeface="Times Roman"/>
@@ -4369,14 +4445,10 @@
           </a:p>
           <a:p>
             <a:pPr marL="457200" indent="-317500" defTabSz="457200">
-              <a:lnSpc>
-                <a:spcPct val="100000"/>
-              </a:lnSpc>
-              <a:spcBef>
-                <a:spcPts val="0"/>
-              </a:spcBef>
+              <a:buSzPct val="123000"/>
               <a:buFont typeface="Times Roman"/>
-              <a:defRPr sz="5000">
+              <a:buChar char="•"/>
+              <a:defRPr b="0" sz="5000">
                 <a:latin typeface="Times Roman"/>
                 <a:ea typeface="Times Roman"/>
                 <a:cs typeface="Times Roman"/>
@@ -4389,14 +4461,10 @@
           </a:p>
           <a:p>
             <a:pPr marL="457200" indent="-317500" defTabSz="457200">
-              <a:lnSpc>
-                <a:spcPct val="100000"/>
-              </a:lnSpc>
-              <a:spcBef>
-                <a:spcPts val="0"/>
-              </a:spcBef>
+              <a:buSzPct val="123000"/>
               <a:buFont typeface="Times Roman"/>
-              <a:defRPr sz="5000">
+              <a:buChar char="•"/>
+              <a:defRPr b="0" sz="5000">
                 <a:latin typeface="Times Roman"/>
                 <a:ea typeface="Times Roman"/>
                 <a:cs typeface="Times Roman"/>
@@ -4409,14 +4477,10 @@
           </a:p>
           <a:p>
             <a:pPr marL="457200" indent="-317500" defTabSz="457200">
-              <a:lnSpc>
-                <a:spcPct val="100000"/>
-              </a:lnSpc>
-              <a:spcBef>
-                <a:spcPts val="0"/>
-              </a:spcBef>
+              <a:buSzPct val="123000"/>
               <a:buFont typeface="Times Roman"/>
-              <a:defRPr sz="5000">
+              <a:buChar char="•"/>
+              <a:defRPr b="0" sz="5000">
                 <a:latin typeface="Times Roman"/>
                 <a:ea typeface="Times Roman"/>
                 <a:cs typeface="Times Roman"/>
@@ -4429,14 +4493,10 @@
           </a:p>
           <a:p>
             <a:pPr marL="457200" indent="-317500" defTabSz="457200">
-              <a:lnSpc>
-                <a:spcPct val="100000"/>
-              </a:lnSpc>
-              <a:spcBef>
-                <a:spcPts val="0"/>
-              </a:spcBef>
+              <a:buSzPct val="123000"/>
               <a:buFont typeface="Times Roman"/>
-              <a:defRPr sz="5000">
+              <a:buChar char="•"/>
+              <a:defRPr b="0" sz="5000">
                 <a:latin typeface="Times Roman"/>
                 <a:ea typeface="Times Roman"/>
                 <a:cs typeface="Times Roman"/>
@@ -4449,14 +4509,10 @@
           </a:p>
           <a:p>
             <a:pPr marL="457200" indent="-317500" defTabSz="457200">
-              <a:lnSpc>
-                <a:spcPct val="100000"/>
-              </a:lnSpc>
-              <a:spcBef>
-                <a:spcPts val="0"/>
-              </a:spcBef>
+              <a:buSzPct val="123000"/>
               <a:buFont typeface="Times Roman"/>
-              <a:defRPr sz="5000">
+              <a:buChar char="•"/>
+              <a:defRPr b="0" sz="5000">
                 <a:latin typeface="Times Roman"/>
                 <a:ea typeface="Times Roman"/>
                 <a:cs typeface="Times Roman"/>
@@ -4477,7 +4533,7 @@
         </p:nvSpPr>
         <p:spPr>
           <a:xfrm>
-            <a:off x="1712755" y="1561599"/>
+            <a:off x="1712754" y="1561598"/>
             <a:ext cx="2711959" cy="1019298"/>
           </a:xfrm>
           <a:prstGeom prst="rect">
@@ -4544,13 +4600,21 @@
           </p:nvPr>
         </p:nvSpPr>
         <p:spPr>
+          <a:xfrm>
+            <a:off x="1206500" y="1079499"/>
+            <a:ext cx="21971000" cy="1433165"/>
+          </a:xfrm>
           <a:prstGeom prst="rect">
             <a:avLst/>
           </a:prstGeom>
         </p:spPr>
         <p:txBody>
           <a:bodyPr/>
-          <a:lstStyle/>
+          <a:lstStyle>
+            <a:lvl1pPr>
+              <a:defRPr spc="-200"/>
+            </a:lvl1pPr>
+          </a:lstStyle>
           <a:p>
             <a:pPr/>
             <a:r>
@@ -4569,27 +4633,22 @@
         </p:nvSpPr>
         <p:spPr>
           <a:xfrm>
-            <a:off x="1206500" y="3804004"/>
-            <a:ext cx="21971000" cy="8256012"/>
+            <a:off x="1206500" y="3804003"/>
+            <a:ext cx="21971000" cy="8256014"/>
           </a:xfrm>
           <a:prstGeom prst="rect">
             <a:avLst/>
           </a:prstGeom>
         </p:spPr>
         <p:txBody>
-          <a:bodyPr/>
+          <a:bodyPr lIns="50800" tIns="50800" rIns="50800" bIns="50800"/>
           <a:lstStyle/>
           <a:p>
-            <a:pPr marL="0" indent="0" defTabSz="457200">
-              <a:lnSpc>
-                <a:spcPct val="100000"/>
-              </a:lnSpc>
+            <a:pPr defTabSz="457200">
               <a:spcBef>
                 <a:spcPts val="1200"/>
               </a:spcBef>
-              <a:buSzTx/>
-              <a:buNone/>
-              <a:defRPr sz="5000">
+              <a:defRPr b="0" sz="5000">
                 <a:latin typeface="Times Roman"/>
                 <a:ea typeface="Times Roman"/>
                 <a:cs typeface="Times Roman"/>
@@ -4601,16 +4660,11 @@
             </a:r>
           </a:p>
           <a:p>
-            <a:pPr marL="0" indent="0" defTabSz="457200">
-              <a:lnSpc>
-                <a:spcPct val="100000"/>
-              </a:lnSpc>
+            <a:pPr defTabSz="457200">
               <a:spcBef>
                 <a:spcPts val="1200"/>
               </a:spcBef>
-              <a:buSzTx/>
-              <a:buNone/>
-              <a:defRPr sz="5000">
+              <a:defRPr b="0" sz="5000">
                 <a:latin typeface="Times Roman"/>
                 <a:ea typeface="Times Roman"/>
                 <a:cs typeface="Times Roman"/>
@@ -4620,14 +4674,10 @@
           </a:p>
           <a:p>
             <a:pPr marL="457200" indent="-317500" defTabSz="457200">
-              <a:lnSpc>
-                <a:spcPct val="100000"/>
-              </a:lnSpc>
-              <a:spcBef>
-                <a:spcPts val="0"/>
-              </a:spcBef>
+              <a:buSzPct val="123000"/>
               <a:buFont typeface="Times Roman"/>
-              <a:defRPr sz="5000">
+              <a:buChar char="•"/>
+              <a:defRPr b="0" sz="5000">
                 <a:latin typeface="Times Roman"/>
                 <a:ea typeface="Times Roman"/>
                 <a:cs typeface="Times Roman"/>
@@ -4640,14 +4690,10 @@
           </a:p>
           <a:p>
             <a:pPr marL="457200" indent="-317500" defTabSz="457200">
-              <a:lnSpc>
-                <a:spcPct val="100000"/>
-              </a:lnSpc>
-              <a:spcBef>
-                <a:spcPts val="0"/>
-              </a:spcBef>
+              <a:buSzPct val="123000"/>
               <a:buFont typeface="Times Roman"/>
-              <a:defRPr sz="5000">
+              <a:buChar char="•"/>
+              <a:defRPr b="0" sz="5000">
                 <a:latin typeface="Times Roman"/>
                 <a:ea typeface="Times Roman"/>
                 <a:cs typeface="Times Roman"/>
@@ -4660,14 +4706,10 @@
           </a:p>
           <a:p>
             <a:pPr marL="457200" indent="-317500" defTabSz="457200">
-              <a:lnSpc>
-                <a:spcPct val="100000"/>
-              </a:lnSpc>
-              <a:spcBef>
-                <a:spcPts val="0"/>
-              </a:spcBef>
+              <a:buSzPct val="123000"/>
               <a:buFont typeface="Times Roman"/>
-              <a:defRPr sz="5000">
+              <a:buChar char="•"/>
+              <a:defRPr b="0" sz="5000">
                 <a:latin typeface="Times Roman"/>
                 <a:ea typeface="Times Roman"/>
                 <a:cs typeface="Times Roman"/>
@@ -4680,14 +4722,10 @@
           </a:p>
           <a:p>
             <a:pPr marL="457200" indent="-317500" defTabSz="457200">
-              <a:lnSpc>
-                <a:spcPct val="100000"/>
-              </a:lnSpc>
-              <a:spcBef>
-                <a:spcPts val="0"/>
-              </a:spcBef>
+              <a:buSzPct val="123000"/>
               <a:buFont typeface="Times Roman"/>
-              <a:defRPr sz="5000">
+              <a:buChar char="•"/>
+              <a:defRPr b="0" sz="5000">
                 <a:latin typeface="Times Roman"/>
                 <a:ea typeface="Times Roman"/>
                 <a:cs typeface="Times Roman"/>
@@ -4700,14 +4738,10 @@
           </a:p>
           <a:p>
             <a:pPr marL="457200" indent="-317500" defTabSz="457200">
-              <a:lnSpc>
-                <a:spcPct val="100000"/>
-              </a:lnSpc>
-              <a:spcBef>
-                <a:spcPts val="0"/>
-              </a:spcBef>
+              <a:buSzPct val="123000"/>
               <a:buFont typeface="Times Roman"/>
-              <a:defRPr sz="5000">
+              <a:buChar char="•"/>
+              <a:defRPr b="0" sz="5000">
                 <a:latin typeface="Times Roman"/>
                 <a:ea typeface="Times Roman"/>
                 <a:cs typeface="Times Roman"/>
@@ -4755,13 +4789,21 @@
           </p:nvPr>
         </p:nvSpPr>
         <p:spPr>
+          <a:xfrm>
+            <a:off x="1206500" y="1079499"/>
+            <a:ext cx="21971000" cy="1433165"/>
+          </a:xfrm>
           <a:prstGeom prst="rect">
             <a:avLst/>
           </a:prstGeom>
         </p:spPr>
         <p:txBody>
           <a:bodyPr/>
-          <a:lstStyle/>
+          <a:lstStyle>
+            <a:lvl1pPr>
+              <a:defRPr spc="-200"/>
+            </a:lvl1pPr>
+          </a:lstStyle>
           <a:p>
             <a:pPr/>
             <a:r>
@@ -4779,24 +4821,23 @@
           </p:nvPr>
         </p:nvSpPr>
         <p:spPr>
+          <a:xfrm>
+            <a:off x="1206500" y="4248503"/>
+            <a:ext cx="21971000" cy="8256014"/>
+          </a:xfrm>
           <a:prstGeom prst="rect">
             <a:avLst/>
           </a:prstGeom>
         </p:spPr>
         <p:txBody>
-          <a:bodyPr/>
+          <a:bodyPr lIns="50800" tIns="50800" rIns="50800" bIns="50800"/>
           <a:lstStyle/>
           <a:p>
-            <a:pPr marL="0" indent="0" defTabSz="457200">
-              <a:lnSpc>
-                <a:spcPct val="100000"/>
-              </a:lnSpc>
+            <a:pPr defTabSz="457200">
               <a:spcBef>
                 <a:spcPts val="1200"/>
               </a:spcBef>
-              <a:buSzTx/>
-              <a:buNone/>
-              <a:defRPr sz="5000">
+              <a:defRPr b="0" sz="5000">
                 <a:latin typeface="Times Roman"/>
                 <a:ea typeface="Times Roman"/>
                 <a:cs typeface="Times Roman"/>
@@ -4809,14 +4850,10 @@
           </a:p>
           <a:p>
             <a:pPr marL="457200" indent="-317500" defTabSz="457200">
-              <a:lnSpc>
-                <a:spcPct val="100000"/>
-              </a:lnSpc>
-              <a:spcBef>
-                <a:spcPts val="0"/>
-              </a:spcBef>
+              <a:buSzPct val="123000"/>
               <a:buFont typeface="Times Roman"/>
-              <a:defRPr sz="5000">
+              <a:buChar char="•"/>
+              <a:defRPr b="0" sz="5000">
                 <a:latin typeface="Times Roman"/>
                 <a:ea typeface="Times Roman"/>
                 <a:cs typeface="Times Roman"/>
@@ -4829,14 +4866,10 @@
           </a:p>
           <a:p>
             <a:pPr marL="457200" indent="-317500" defTabSz="457200">
-              <a:lnSpc>
-                <a:spcPct val="100000"/>
-              </a:lnSpc>
-              <a:spcBef>
-                <a:spcPts val="0"/>
-              </a:spcBef>
+              <a:buSzPct val="123000"/>
               <a:buFont typeface="Times Roman"/>
-              <a:defRPr sz="5000">
+              <a:buChar char="•"/>
+              <a:defRPr b="0" sz="5000">
                 <a:latin typeface="Times Roman"/>
                 <a:ea typeface="Times Roman"/>
                 <a:cs typeface="Times Roman"/>
@@ -4849,14 +4882,10 @@
           </a:p>
           <a:p>
             <a:pPr marL="457200" indent="-317500" defTabSz="457200">
-              <a:lnSpc>
-                <a:spcPct val="100000"/>
-              </a:lnSpc>
-              <a:spcBef>
-                <a:spcPts val="0"/>
-              </a:spcBef>
+              <a:buSzPct val="123000"/>
               <a:buFont typeface="Times Roman"/>
-              <a:defRPr sz="5000">
+              <a:buChar char="•"/>
+              <a:defRPr b="0" sz="5000">
                 <a:latin typeface="Times Roman"/>
                 <a:ea typeface="Times Roman"/>
                 <a:cs typeface="Times Roman"/>
@@ -4869,14 +4898,10 @@
           </a:p>
           <a:p>
             <a:pPr marL="457200" indent="-317500" defTabSz="457200">
-              <a:lnSpc>
-                <a:spcPct val="100000"/>
-              </a:lnSpc>
-              <a:spcBef>
-                <a:spcPts val="0"/>
-              </a:spcBef>
+              <a:buSzPct val="123000"/>
               <a:buFont typeface="Times Roman"/>
-              <a:defRPr sz="5000">
+              <a:buChar char="•"/>
+              <a:defRPr b="0" sz="5000">
                 <a:latin typeface="Times Roman"/>
                 <a:ea typeface="Times Roman"/>
                 <a:cs typeface="Times Roman"/>
@@ -4889,14 +4914,10 @@
           </a:p>
           <a:p>
             <a:pPr marL="457200" indent="-317500" defTabSz="457200">
-              <a:lnSpc>
-                <a:spcPct val="100000"/>
-              </a:lnSpc>
-              <a:spcBef>
-                <a:spcPts val="0"/>
-              </a:spcBef>
+              <a:buSzPct val="123000"/>
               <a:buFont typeface="Times Roman"/>
-              <a:defRPr sz="5000">
+              <a:buChar char="•"/>
+              <a:defRPr b="0" sz="5000">
                 <a:latin typeface="Times Roman"/>
                 <a:ea typeface="Times Roman"/>
                 <a:cs typeface="Times Roman"/>
@@ -4944,13 +4965,21 @@
           </p:nvPr>
         </p:nvSpPr>
         <p:spPr>
+          <a:xfrm>
+            <a:off x="1206500" y="1079499"/>
+            <a:ext cx="21971000" cy="1433165"/>
+          </a:xfrm>
           <a:prstGeom prst="rect">
             <a:avLst/>
           </a:prstGeom>
         </p:spPr>
         <p:txBody>
           <a:bodyPr/>
-          <a:lstStyle/>
+          <a:lstStyle>
+            <a:lvl1pPr>
+              <a:defRPr spc="-200"/>
+            </a:lvl1pPr>
+          </a:lstStyle>
           <a:p>
             <a:pPr/>
             <a:r>
@@ -4968,41 +4997,22 @@
           </p:nvPr>
         </p:nvSpPr>
         <p:spPr>
+          <a:xfrm>
+            <a:off x="1206500" y="4248503"/>
+            <a:ext cx="21971000" cy="8256014"/>
+          </a:xfrm>
           <a:prstGeom prst="rect">
             <a:avLst/>
           </a:prstGeom>
         </p:spPr>
         <p:txBody>
-          <a:bodyPr/>
+          <a:bodyPr lIns="50800" tIns="50800" rIns="50800" bIns="50800"/>
           <a:lstStyle/>
           <a:p>
-            <a:pPr marL="0" indent="0" defTabSz="457200">
-              <a:lnSpc>
-                <a:spcPct val="100000"/>
-              </a:lnSpc>
+            <a:pPr defTabSz="457200">
               <a:spcBef>
                 <a:spcPts val="1400"/>
               </a:spcBef>
-              <a:buSzTx/>
-              <a:buNone/>
-              <a:defRPr b="1" sz="5000">
-                <a:latin typeface="Times Roman"/>
-                <a:ea typeface="Times Roman"/>
-                <a:cs typeface="Times Roman"/>
-                <a:sym typeface="Times Roman"/>
-              </a:defRPr>
-            </a:pPr>
-          </a:p>
-          <a:p>
-            <a:pPr marL="0" indent="0" defTabSz="457200">
-              <a:lnSpc>
-                <a:spcPct val="100000"/>
-              </a:lnSpc>
-              <a:spcBef>
-                <a:spcPts val="1200"/>
-              </a:spcBef>
-              <a:buSzTx/>
-              <a:buNone/>
               <a:defRPr sz="5000">
                 <a:latin typeface="Times Roman"/>
                 <a:ea typeface="Times Roman"/>
@@ -5010,20 +5020,13 @@
                 <a:sym typeface="Times Roman"/>
               </a:defRPr>
             </a:pPr>
-            <a:r>
-              <a:t>I transformed the data to make it analysis-ready:</a:t>
-            </a:r>
-          </a:p>
-          <a:p>
-            <a:pPr marL="457200" indent="-317500" defTabSz="457200">
-              <a:lnSpc>
-                <a:spcPct val="100000"/>
-              </a:lnSpc>
+          </a:p>
+          <a:p>
+            <a:pPr defTabSz="457200">
               <a:spcBef>
-                <a:spcPts val="0"/>
+                <a:spcPts val="1200"/>
               </a:spcBef>
-              <a:buFont typeface="Times Roman"/>
-              <a:defRPr sz="5000">
+              <a:defRPr b="0" sz="5000">
                 <a:latin typeface="Times Roman"/>
                 <a:ea typeface="Times Roman"/>
                 <a:cs typeface="Times Roman"/>
@@ -5031,19 +5034,15 @@
               </a:defRPr>
             </a:pPr>
             <a:r>
-              <a:t>Cleaned item fat content values</a:t>
+              <a:t>I transformed the data to make it analysis-ready:</a:t>
             </a:r>
           </a:p>
           <a:p>
             <a:pPr marL="457200" indent="-317500" defTabSz="457200">
-              <a:lnSpc>
-                <a:spcPct val="100000"/>
-              </a:lnSpc>
-              <a:spcBef>
-                <a:spcPts val="0"/>
-              </a:spcBef>
+              <a:buSzPct val="123000"/>
               <a:buFont typeface="Times Roman"/>
-              <a:defRPr sz="5000">
+              <a:buChar char="•"/>
+              <a:defRPr b="0" sz="5000">
                 <a:latin typeface="Times Roman"/>
                 <a:ea typeface="Times Roman"/>
                 <a:cs typeface="Times Roman"/>
@@ -5051,19 +5050,15 @@
               </a:defRPr>
             </a:pPr>
             <a:r>
-              <a:t>Checked numerical columns</a:t>
+              <a:t>Cleaned item fat content values</a:t>
             </a:r>
           </a:p>
           <a:p>
             <a:pPr marL="457200" indent="-317500" defTabSz="457200">
-              <a:lnSpc>
-                <a:spcPct val="100000"/>
-              </a:lnSpc>
-              <a:spcBef>
-                <a:spcPts val="0"/>
-              </a:spcBef>
+              <a:buSzPct val="123000"/>
               <a:buFont typeface="Times Roman"/>
-              <a:defRPr sz="5000">
+              <a:buChar char="•"/>
+              <a:defRPr b="0" sz="5000">
                 <a:latin typeface="Times Roman"/>
                 <a:ea typeface="Times Roman"/>
                 <a:cs typeface="Times Roman"/>
@@ -5071,19 +5066,31 @@
               </a:defRPr>
             </a:pPr>
             <a:r>
+              <a:t>Checked numerical columns</a:t>
+            </a:r>
+          </a:p>
+          <a:p>
+            <a:pPr marL="457200" indent="-317500" defTabSz="457200">
+              <a:buSzPct val="123000"/>
+              <a:buFont typeface="Times Roman"/>
+              <a:buChar char="•"/>
+              <a:defRPr b="0" sz="5000">
+                <a:latin typeface="Times Roman"/>
+                <a:ea typeface="Times Roman"/>
+                <a:cs typeface="Times Roman"/>
+                <a:sym typeface="Times Roman"/>
+              </a:defRPr>
+            </a:pPr>
+            <a:r>
               <a:t>Verified sales and rating columns</a:t>
             </a:r>
           </a:p>
           <a:p>
             <a:pPr marL="457200" indent="-317500" defTabSz="457200">
-              <a:lnSpc>
-                <a:spcPct val="100000"/>
-              </a:lnSpc>
-              <a:spcBef>
-                <a:spcPts val="0"/>
-              </a:spcBef>
+              <a:buSzPct val="123000"/>
               <a:buFont typeface="Times Roman"/>
-              <a:defRPr sz="5000">
+              <a:buChar char="•"/>
+              <a:defRPr b="0" sz="5000">
                 <a:latin typeface="Times Roman"/>
                 <a:ea typeface="Times Roman"/>
                 <a:cs typeface="Times Roman"/>
@@ -5131,13 +5138,21 @@
           </p:nvPr>
         </p:nvSpPr>
         <p:spPr>
+          <a:xfrm>
+            <a:off x="1206500" y="1079499"/>
+            <a:ext cx="21971000" cy="1433165"/>
+          </a:xfrm>
           <a:prstGeom prst="rect">
             <a:avLst/>
           </a:prstGeom>
         </p:spPr>
         <p:txBody>
           <a:bodyPr/>
-          <a:lstStyle/>
+          <a:lstStyle>
+            <a:lvl1pPr>
+              <a:defRPr spc="-200"/>
+            </a:lvl1pPr>
+          </a:lstStyle>
           <a:p>
             <a:pPr/>
             <a:r>
@@ -5156,44 +5171,21 @@
         </p:nvSpPr>
         <p:spPr>
           <a:xfrm>
-            <a:off x="1206500" y="3816704"/>
-            <a:ext cx="21971000" cy="8256012"/>
+            <a:off x="1206500" y="3816703"/>
+            <a:ext cx="21971000" cy="8256014"/>
           </a:xfrm>
           <a:prstGeom prst="rect">
             <a:avLst/>
           </a:prstGeom>
         </p:spPr>
         <p:txBody>
-          <a:bodyPr/>
+          <a:bodyPr lIns="50800" tIns="50800" rIns="50800" bIns="50800"/>
           <a:lstStyle/>
           <a:p>
-            <a:pPr marL="0" indent="0" defTabSz="356615">
-              <a:lnSpc>
-                <a:spcPct val="100000"/>
-              </a:lnSpc>
+            <a:pPr defTabSz="356615">
               <a:spcBef>
                 <a:spcPts val="1100"/>
               </a:spcBef>
-              <a:buSzTx/>
-              <a:buNone/>
-              <a:defRPr b="1" sz="3900">
-                <a:latin typeface="Times Roman"/>
-                <a:ea typeface="Times Roman"/>
-                <a:cs typeface="Times Roman"/>
-                <a:sym typeface="Times Roman"/>
-              </a:defRPr>
-            </a:pPr>
-          </a:p>
-          <a:p>
-            <a:pPr marL="0" indent="0" defTabSz="356615">
-              <a:lnSpc>
-                <a:spcPct val="100000"/>
-              </a:lnSpc>
-              <a:spcBef>
-                <a:spcPts val="900"/>
-              </a:spcBef>
-              <a:buSzTx/>
-              <a:buNone/>
               <a:defRPr sz="3900">
                 <a:latin typeface="Times Roman"/>
                 <a:ea typeface="Times Roman"/>
@@ -5201,21 +5193,26 @@
                 <a:sym typeface="Times Roman"/>
               </a:defRPr>
             </a:pPr>
+          </a:p>
+          <a:p>
+            <a:pPr defTabSz="356615">
+              <a:spcBef>
+                <a:spcPts val="900"/>
+              </a:spcBef>
+              <a:defRPr b="0" sz="3900">
+                <a:latin typeface="Times Roman"/>
+                <a:ea typeface="Times Roman"/>
+                <a:cs typeface="Times Roman"/>
+                <a:sym typeface="Times Roman"/>
+              </a:defRPr>
+            </a:pPr>
             <a:r>
               <a:t>I created measures like:</a:t>
             </a:r>
           </a:p>
           <a:p>
-            <a:pPr marL="0" indent="0" defTabSz="356615">
-              <a:lnSpc>
-                <a:spcPct val="100000"/>
-              </a:lnSpc>
-              <a:spcBef>
-                <a:spcPts val="0"/>
-              </a:spcBef>
-              <a:buSzTx/>
-              <a:buNone/>
-              <a:defRPr sz="3900">
+            <a:pPr defTabSz="356615">
+              <a:defRPr b="0" sz="3900">
                 <a:latin typeface="Courier"/>
                 <a:ea typeface="Courier"/>
                 <a:cs typeface="Courier"/>
@@ -5224,16 +5221,8 @@
             </a:pPr>
           </a:p>
           <a:p>
-            <a:pPr marL="0" indent="0" defTabSz="356615">
-              <a:lnSpc>
-                <a:spcPct val="100000"/>
-              </a:lnSpc>
-              <a:spcBef>
-                <a:spcPts val="0"/>
-              </a:spcBef>
-              <a:buSzTx/>
-              <a:buNone/>
-              <a:defRPr sz="3900">
+            <a:pPr defTabSz="356615">
+              <a:defRPr b="0" sz="3900">
                 <a:latin typeface="Courier"/>
                 <a:ea typeface="Courier"/>
                 <a:cs typeface="Courier"/>
@@ -5245,16 +5234,8 @@
             </a:r>
           </a:p>
           <a:p>
-            <a:pPr marL="0" indent="0" defTabSz="356615">
-              <a:lnSpc>
-                <a:spcPct val="100000"/>
-              </a:lnSpc>
-              <a:spcBef>
-                <a:spcPts val="0"/>
-              </a:spcBef>
-              <a:buSzTx/>
-              <a:buNone/>
-              <a:defRPr sz="3900">
+            <a:pPr defTabSz="356615">
+              <a:defRPr b="0" sz="3900">
                 <a:latin typeface="Courier"/>
                 <a:ea typeface="Courier"/>
                 <a:cs typeface="Courier"/>
@@ -5263,16 +5244,8 @@
             </a:pPr>
           </a:p>
           <a:p>
-            <a:pPr marL="0" indent="0" defTabSz="356615">
-              <a:lnSpc>
-                <a:spcPct val="100000"/>
-              </a:lnSpc>
-              <a:spcBef>
-                <a:spcPts val="0"/>
-              </a:spcBef>
-              <a:buSzTx/>
-              <a:buNone/>
-              <a:defRPr sz="3900">
+            <a:pPr defTabSz="356615">
+              <a:defRPr b="0" sz="3900">
                 <a:latin typeface="Courier"/>
                 <a:ea typeface="Courier"/>
                 <a:cs typeface="Courier"/>
@@ -5281,16 +5254,8 @@
             </a:pPr>
           </a:p>
           <a:p>
-            <a:pPr marL="0" indent="0" defTabSz="356615">
-              <a:lnSpc>
-                <a:spcPct val="100000"/>
-              </a:lnSpc>
-              <a:spcBef>
-                <a:spcPts val="0"/>
-              </a:spcBef>
-              <a:buSzTx/>
-              <a:buNone/>
-              <a:defRPr sz="3900">
+            <a:pPr defTabSz="356615">
+              <a:defRPr b="0" sz="3900">
                 <a:latin typeface="Courier"/>
                 <a:ea typeface="Courier"/>
                 <a:cs typeface="Courier"/>
@@ -5302,16 +5267,8 @@
             </a:r>
           </a:p>
           <a:p>
-            <a:pPr marL="0" indent="0" defTabSz="356615">
-              <a:lnSpc>
-                <a:spcPct val="100000"/>
-              </a:lnSpc>
-              <a:spcBef>
-                <a:spcPts val="0"/>
-              </a:spcBef>
-              <a:buSzTx/>
-              <a:buNone/>
-              <a:defRPr sz="3900">
+            <a:pPr defTabSz="356615">
+              <a:defRPr b="0" sz="3900">
                 <a:latin typeface="Courier"/>
                 <a:ea typeface="Courier"/>
                 <a:cs typeface="Courier"/>
@@ -5320,16 +5277,8 @@
             </a:pPr>
           </a:p>
           <a:p>
-            <a:pPr marL="0" indent="0" defTabSz="356615">
-              <a:lnSpc>
-                <a:spcPct val="100000"/>
-              </a:lnSpc>
-              <a:spcBef>
-                <a:spcPts val="0"/>
-              </a:spcBef>
-              <a:buSzTx/>
-              <a:buNone/>
-              <a:defRPr sz="3900">
+            <a:pPr defTabSz="356615">
+              <a:defRPr b="0" sz="3900">
                 <a:latin typeface="Courier"/>
                 <a:ea typeface="Courier"/>
                 <a:cs typeface="Courier"/>
@@ -5338,16 +5287,8 @@
             </a:pPr>
           </a:p>
           <a:p>
-            <a:pPr marL="0" indent="0" defTabSz="356615">
-              <a:lnSpc>
-                <a:spcPct val="100000"/>
-              </a:lnSpc>
-              <a:spcBef>
-                <a:spcPts val="0"/>
-              </a:spcBef>
-              <a:buSzTx/>
-              <a:buNone/>
-              <a:defRPr sz="3900">
+            <a:pPr defTabSz="356615">
+              <a:defRPr b="0" sz="3900">
                 <a:latin typeface="Courier"/>
                 <a:ea typeface="Courier"/>
                 <a:cs typeface="Courier"/>
@@ -5359,16 +5300,8 @@
             </a:r>
           </a:p>
           <a:p>
-            <a:pPr marL="0" indent="0" defTabSz="356615">
-              <a:lnSpc>
-                <a:spcPct val="100000"/>
-              </a:lnSpc>
-              <a:spcBef>
-                <a:spcPts val="0"/>
-              </a:spcBef>
-              <a:buSzTx/>
-              <a:buNone/>
-              <a:defRPr sz="3900">
+            <a:pPr defTabSz="356615">
+              <a:defRPr b="0" sz="3900">
                 <a:latin typeface="Courier"/>
                 <a:ea typeface="Courier"/>
                 <a:cs typeface="Courier"/>
@@ -5377,16 +5310,8 @@
             </a:pPr>
           </a:p>
           <a:p>
-            <a:pPr marL="0" indent="0" defTabSz="356615">
-              <a:lnSpc>
-                <a:spcPct val="100000"/>
-              </a:lnSpc>
-              <a:spcBef>
-                <a:spcPts val="0"/>
-              </a:spcBef>
-              <a:buSzTx/>
-              <a:buNone/>
-              <a:defRPr sz="3900">
+            <a:pPr defTabSz="356615">
+              <a:defRPr b="0" sz="3900">
                 <a:latin typeface="Courier"/>
                 <a:ea typeface="Courier"/>
                 <a:cs typeface="Courier"/>
@@ -5395,16 +5320,8 @@
             </a:pPr>
           </a:p>
           <a:p>
-            <a:pPr marL="0" indent="0" defTabSz="356615">
-              <a:lnSpc>
-                <a:spcPct val="100000"/>
-              </a:lnSpc>
-              <a:spcBef>
-                <a:spcPts val="0"/>
-              </a:spcBef>
-              <a:buSzTx/>
-              <a:buNone/>
-              <a:defRPr sz="3900">
+            <a:pPr defTabSz="356615">
+              <a:defRPr b="0" sz="3900">
                 <a:latin typeface="Courier"/>
                 <a:ea typeface="Courier"/>
                 <a:cs typeface="Courier"/>
@@ -5452,13 +5369,21 @@
           </p:nvPr>
         </p:nvSpPr>
         <p:spPr>
+          <a:xfrm>
+            <a:off x="1206500" y="1079499"/>
+            <a:ext cx="21971000" cy="1433165"/>
+          </a:xfrm>
           <a:prstGeom prst="rect">
             <a:avLst/>
           </a:prstGeom>
         </p:spPr>
         <p:txBody>
           <a:bodyPr/>
-          <a:lstStyle/>
+          <a:lstStyle>
+            <a:lvl1pPr>
+              <a:defRPr spc="-200"/>
+            </a:lvl1pPr>
+          </a:lstStyle>
           <a:p>
             <a:pPr/>
             <a:r>
@@ -5477,26 +5402,18 @@
         </p:nvSpPr>
         <p:spPr>
           <a:xfrm>
-            <a:off x="1206500" y="3943704"/>
-            <a:ext cx="21971000" cy="8256012"/>
+            <a:off x="1206500" y="3943703"/>
+            <a:ext cx="21971000" cy="8256014"/>
           </a:xfrm>
           <a:prstGeom prst="rect">
             <a:avLst/>
           </a:prstGeom>
         </p:spPr>
         <p:txBody>
-          <a:bodyPr/>
+          <a:bodyPr lIns="50800" tIns="50800" rIns="50800" bIns="50800"/>
           <a:lstStyle/>
           <a:p>
-            <a:pPr marL="0" indent="0" defTabSz="457200">
-              <a:lnSpc>
-                <a:spcPct val="100000"/>
-              </a:lnSpc>
-              <a:spcBef>
-                <a:spcPts val="0"/>
-              </a:spcBef>
-              <a:buSzTx/>
-              <a:buNone/>
+            <a:pPr defTabSz="457200">
               <a:defRPr sz="5000">
                 <a:latin typeface="Times Roman"/>
                 <a:ea typeface="Times Roman"/>
@@ -5505,23 +5422,16 @@
               </a:defRPr>
             </a:pPr>
             <a:r>
-              <a:rPr b="1"/>
               <a:t>Card Visuals</a:t>
             </a:r>
             <a:r>
+              <a:rPr b="0"/>
               <a:t> → Total Sales, Average Sales, Number of Items, Average Rating</a:t>
             </a:r>
-          </a:p>
-          <a:p>
-            <a:pPr marL="0" indent="0" defTabSz="457200">
-              <a:lnSpc>
-                <a:spcPct val="100000"/>
-              </a:lnSpc>
-              <a:spcBef>
-                <a:spcPts val="0"/>
-              </a:spcBef>
-              <a:buSzTx/>
-              <a:buNone/>
+            <a:endParaRPr b="0"/>
+          </a:p>
+          <a:p>
+            <a:pPr defTabSz="457200">
               <a:defRPr sz="5000">
                 <a:latin typeface="Times Roman"/>
                 <a:ea typeface="Times Roman"/>
@@ -5530,23 +5440,16 @@
               </a:defRPr>
             </a:pPr>
             <a:r>
-              <a:rPr b="1"/>
               <a:t>Area Chart</a:t>
             </a:r>
             <a:r>
+              <a:rPr b="0"/>
               <a:t> → Total Sales by Outlet Establishment Year</a:t>
             </a:r>
-          </a:p>
-          <a:p>
-            <a:pPr marL="0" indent="0" defTabSz="457200">
-              <a:lnSpc>
-                <a:spcPct val="100000"/>
-              </a:lnSpc>
-              <a:spcBef>
-                <a:spcPts val="0"/>
-              </a:spcBef>
-              <a:buSzTx/>
-              <a:buNone/>
+            <a:endParaRPr b="0"/>
+          </a:p>
+          <a:p>
+            <a:pPr defTabSz="457200">
               <a:defRPr sz="5000">
                 <a:latin typeface="Times Roman"/>
                 <a:ea typeface="Times Roman"/>
@@ -5555,23 +5458,16 @@
               </a:defRPr>
             </a:pPr>
             <a:r>
-              <a:rPr b="1"/>
               <a:t>Funnel Chart</a:t>
             </a:r>
             <a:r>
+              <a:rPr b="0"/>
               <a:t> → Total Sales by Outlet Location Type</a:t>
             </a:r>
-          </a:p>
-          <a:p>
-            <a:pPr marL="0" indent="0" defTabSz="457200">
-              <a:lnSpc>
-                <a:spcPct val="100000"/>
-              </a:lnSpc>
-              <a:spcBef>
-                <a:spcPts val="0"/>
-              </a:spcBef>
-              <a:buSzTx/>
-              <a:buNone/>
+            <a:endParaRPr b="0"/>
+          </a:p>
+          <a:p>
+            <a:pPr defTabSz="457200">
               <a:defRPr sz="5000">
                 <a:latin typeface="Times Roman"/>
                 <a:ea typeface="Times Roman"/>
@@ -5580,23 +5476,16 @@
               </a:defRPr>
             </a:pPr>
             <a:r>
-              <a:rPr b="1"/>
               <a:t>Donut Chart</a:t>
             </a:r>
             <a:r>
+              <a:rPr b="0"/>
               <a:t> → Fat Content Analysis</a:t>
             </a:r>
-          </a:p>
-          <a:p>
-            <a:pPr marL="0" indent="0" defTabSz="457200">
-              <a:lnSpc>
-                <a:spcPct val="100000"/>
-              </a:lnSpc>
-              <a:spcBef>
-                <a:spcPts val="0"/>
-              </a:spcBef>
-              <a:buSzTx/>
-              <a:buNone/>
+            <a:endParaRPr b="0"/>
+          </a:p>
+          <a:p>
+            <a:pPr defTabSz="457200">
               <a:defRPr sz="5000">
                 <a:latin typeface="Times Roman"/>
                 <a:ea typeface="Times Roman"/>
@@ -5605,23 +5494,16 @@
               </a:defRPr>
             </a:pPr>
             <a:r>
-              <a:rPr b="1"/>
               <a:t>Clustered Bar Chart</a:t>
             </a:r>
             <a:r>
+              <a:rPr b="0"/>
               <a:t> → Item Fat Content by Outlet Location Type</a:t>
             </a:r>
-          </a:p>
-          <a:p>
-            <a:pPr marL="0" indent="0" defTabSz="457200">
-              <a:lnSpc>
-                <a:spcPct val="100000"/>
-              </a:lnSpc>
-              <a:spcBef>
-                <a:spcPts val="0"/>
-              </a:spcBef>
-              <a:buSzTx/>
-              <a:buNone/>
+            <a:endParaRPr b="0"/>
+          </a:p>
+          <a:p>
+            <a:pPr defTabSz="457200">
               <a:defRPr sz="5000">
                 <a:latin typeface="Times Roman"/>
                 <a:ea typeface="Times Roman"/>
@@ -5630,23 +5512,16 @@
               </a:defRPr>
             </a:pPr>
             <a:r>
-              <a:rPr b="1"/>
               <a:t>Horizontal Bar Chart</a:t>
             </a:r>
             <a:r>
+              <a:rPr b="0"/>
               <a:t> → Item Type Analysis</a:t>
             </a:r>
-          </a:p>
-          <a:p>
-            <a:pPr marL="0" indent="0" defTabSz="457200">
-              <a:lnSpc>
-                <a:spcPct val="100000"/>
-              </a:lnSpc>
-              <a:spcBef>
-                <a:spcPts val="0"/>
-              </a:spcBef>
-              <a:buSzTx/>
-              <a:buNone/>
+            <a:endParaRPr b="0"/>
+          </a:p>
+          <a:p>
+            <a:pPr defTabSz="457200">
               <a:defRPr sz="5000">
                 <a:latin typeface="Times Roman"/>
                 <a:ea typeface="Times Roman"/>
@@ -5655,23 +5530,16 @@
               </a:defRPr>
             </a:pPr>
             <a:r>
-              <a:rPr b="1"/>
               <a:t>Pie Chart</a:t>
             </a:r>
             <a:r>
+              <a:rPr b="0"/>
               <a:t> → Total Sales by Outlet Size</a:t>
             </a:r>
-          </a:p>
-          <a:p>
-            <a:pPr marL="0" indent="0" defTabSz="457200">
-              <a:lnSpc>
-                <a:spcPct val="100000"/>
-              </a:lnSpc>
-              <a:spcBef>
-                <a:spcPts val="0"/>
-              </a:spcBef>
-              <a:buSzTx/>
-              <a:buNone/>
+            <a:endParaRPr b="0"/>
+          </a:p>
+          <a:p>
+            <a:pPr defTabSz="457200">
               <a:defRPr sz="5000">
                 <a:latin typeface="Times Roman"/>
                 <a:ea typeface="Times Roman"/>
@@ -5680,30 +5548,12 @@
               </a:defRPr>
             </a:pPr>
             <a:r>
-              <a:rPr b="1"/>
               <a:t>Table Visual</a:t>
             </a:r>
             <a:r>
+              <a:rPr b="0"/>
               <a:t> → Outlet Type Analysis</a:t>
             </a:r>
-          </a:p>
-          <a:p>
-            <a:pPr marL="0" indent="0" defTabSz="457200">
-              <a:lnSpc>
-                <a:spcPct val="100000"/>
-              </a:lnSpc>
-              <a:spcBef>
-                <a:spcPts val="0"/>
-              </a:spcBef>
-              <a:buSzTx/>
-              <a:buNone/>
-              <a:defRPr sz="5000">
-                <a:latin typeface="Times Roman"/>
-                <a:ea typeface="Times Roman"/>
-                <a:cs typeface="Times Roman"/>
-                <a:sym typeface="Times Roman"/>
-              </a:defRPr>
-            </a:pPr>
           </a:p>
         </p:txBody>
       </p:sp>
@@ -5735,7 +5585,7 @@
       </p:grpSpPr>
       <p:pic>
         <p:nvPicPr>
-          <p:cNvPr id="173" name="Screenshot 2026-03-15 at 10.43.18 AM.png" descr="Screenshot 2026-03-15 at 10.43.18 AM.png"/>
+          <p:cNvPr id="173" name="Screenshot 2026-05-26 at 2.18.49 PM.png" descr="Screenshot 2026-05-26 at 2.18.49 PM.png"/>
           <p:cNvPicPr>
             <a:picLocks noChangeAspect="1"/>
           </p:cNvPicPr>
@@ -5751,8 +5601,8 @@
         </p:blipFill>
         <p:spPr>
           <a:xfrm>
-            <a:off x="45692" y="-1169476"/>
-            <a:ext cx="24292616" cy="15182887"/>
+            <a:off x="203454" y="-3243814"/>
+            <a:ext cx="32325805" cy="20203628"/>
           </a:xfrm>
           <a:prstGeom prst="rect">
             <a:avLst/>
@@ -5797,13 +5647,21 @@
           </p:nvPr>
         </p:nvSpPr>
         <p:spPr>
+          <a:xfrm>
+            <a:off x="1206500" y="1079499"/>
+            <a:ext cx="21971000" cy="1433165"/>
+          </a:xfrm>
           <a:prstGeom prst="rect">
             <a:avLst/>
           </a:prstGeom>
         </p:spPr>
         <p:txBody>
           <a:bodyPr/>
-          <a:lstStyle/>
+          <a:lstStyle>
+            <a:lvl1pPr>
+              <a:defRPr spc="-200"/>
+            </a:lvl1pPr>
+          </a:lstStyle>
           <a:p>
             <a:pPr/>
             <a:r>
@@ -5821,24 +5679,23 @@
           </p:nvPr>
         </p:nvSpPr>
         <p:spPr>
+          <a:xfrm>
+            <a:off x="1206500" y="4248503"/>
+            <a:ext cx="21971000" cy="8256014"/>
+          </a:xfrm>
           <a:prstGeom prst="rect">
             <a:avLst/>
           </a:prstGeom>
         </p:spPr>
         <p:txBody>
-          <a:bodyPr/>
+          <a:bodyPr lIns="50800" tIns="50800" rIns="50800" bIns="50800"/>
           <a:lstStyle/>
           <a:p>
-            <a:pPr marL="0" indent="0" defTabSz="457200">
-              <a:lnSpc>
-                <a:spcPct val="100000"/>
-              </a:lnSpc>
+            <a:pPr defTabSz="457200">
               <a:spcBef>
                 <a:spcPts val="1200"/>
               </a:spcBef>
-              <a:buSzTx/>
-              <a:buNone/>
-              <a:defRPr sz="5000">
+              <a:defRPr b="0" sz="5000">
                 <a:latin typeface="Times Roman"/>
                 <a:ea typeface="Times Roman"/>
                 <a:cs typeface="Times Roman"/>
@@ -5851,14 +5708,10 @@
           </a:p>
           <a:p>
             <a:pPr marL="457200" indent="-317500" defTabSz="457200">
-              <a:lnSpc>
-                <a:spcPct val="100000"/>
-              </a:lnSpc>
-              <a:spcBef>
-                <a:spcPts val="0"/>
-              </a:spcBef>
+              <a:buSzPct val="123000"/>
               <a:buFont typeface="Times Roman"/>
-              <a:defRPr sz="5000">
+              <a:buChar char="•"/>
+              <a:defRPr b="0" sz="5000">
                 <a:latin typeface="Times Roman"/>
                 <a:ea typeface="Times Roman"/>
                 <a:cs typeface="Times Roman"/>
@@ -5871,14 +5724,10 @@
           </a:p>
           <a:p>
             <a:pPr marL="457200" indent="-317500" defTabSz="457200">
-              <a:lnSpc>
-                <a:spcPct val="100000"/>
-              </a:lnSpc>
-              <a:spcBef>
-                <a:spcPts val="0"/>
-              </a:spcBef>
+              <a:buSzPct val="123000"/>
               <a:buFont typeface="Times Roman"/>
-              <a:defRPr sz="5000">
+              <a:buChar char="•"/>
+              <a:defRPr b="0" sz="5000">
                 <a:latin typeface="Times Roman"/>
                 <a:ea typeface="Times Roman"/>
                 <a:cs typeface="Times Roman"/>
@@ -5891,14 +5740,10 @@
           </a:p>
           <a:p>
             <a:pPr marL="457200" indent="-317500" defTabSz="457200">
-              <a:lnSpc>
-                <a:spcPct val="100000"/>
-              </a:lnSpc>
-              <a:spcBef>
-                <a:spcPts val="0"/>
-              </a:spcBef>
+              <a:buSzPct val="123000"/>
               <a:buFont typeface="Times Roman"/>
-              <a:defRPr sz="5000">
+              <a:buChar char="•"/>
+              <a:defRPr b="0" sz="5000">
                 <a:latin typeface="Times Roman"/>
                 <a:ea typeface="Times Roman"/>
                 <a:cs typeface="Times Roman"/>
@@ -5911,14 +5756,10 @@
           </a:p>
           <a:p>
             <a:pPr marL="457200" indent="-317500" defTabSz="457200">
-              <a:lnSpc>
-                <a:spcPct val="100000"/>
-              </a:lnSpc>
-              <a:spcBef>
-                <a:spcPts val="0"/>
-              </a:spcBef>
+              <a:buSzPct val="123000"/>
               <a:buFont typeface="Times Roman"/>
-              <a:defRPr sz="5000">
+              <a:buChar char="•"/>
+              <a:defRPr b="0" sz="5000">
                 <a:latin typeface="Times Roman"/>
                 <a:ea typeface="Times Roman"/>
                 <a:cs typeface="Times Roman"/>
@@ -5931,14 +5772,10 @@
           </a:p>
           <a:p>
             <a:pPr marL="457200" indent="-317500" defTabSz="457200">
-              <a:lnSpc>
-                <a:spcPct val="100000"/>
-              </a:lnSpc>
-              <a:spcBef>
-                <a:spcPts val="0"/>
-              </a:spcBef>
+              <a:buSzPct val="123000"/>
               <a:buFont typeface="Times Roman"/>
-              <a:defRPr sz="5000">
+              <a:buChar char="•"/>
+              <a:defRPr b="0" sz="5000">
                 <a:latin typeface="Times Roman"/>
                 <a:ea typeface="Times Roman"/>
                 <a:cs typeface="Times Roman"/>
@@ -5968,13 +5805,13 @@
         <a:srgbClr val="5E5E5E"/>
       </a:dk1>
       <a:lt1>
-        <a:srgbClr val="005E00"/>
+        <a:srgbClr val="FFFFFF"/>
       </a:lt1>
       <a:dk2>
-        <a:srgbClr val="5E5E5E"/>
+        <a:srgbClr val="A7A7A7"/>
       </a:dk2>
       <a:lt2>
-        <a:srgbClr val="D5D5D5"/>
+        <a:srgbClr val="535353"/>
       </a:lt2>
       <a:accent1>
         <a:srgbClr val="00A2FF"/>
@@ -6008,9 +5845,9 @@
         <a:cs typeface="Helvetica Neue"/>
       </a:majorFont>
       <a:minorFont>
-        <a:latin typeface="Helvetica Neue"/>
-        <a:ea typeface="Helvetica Neue"/>
-        <a:cs typeface="Helvetica Neue"/>
+        <a:latin typeface="Helvetica"/>
+        <a:ea typeface="Helvetica"/>
+        <a:cs typeface="Helvetica"/>
       </a:minorFont>
     </a:fontScheme>
     <a:fmtScheme name="33_DynamicLight">
@@ -6151,11 +5988,14 @@
     <a:spDef>
       <a:spPr>
         <a:solidFill>
-          <a:srgbClr val="000000"/>
+          <a:srgbClr val="005E00"/>
         </a:solidFill>
-        <a:ln w="12700" cap="flat">
-          <a:noFill/>
-          <a:miter lim="400000"/>
+        <a:ln w="25400" cap="flat">
+          <a:solidFill>
+            <a:schemeClr val="accent1"/>
+          </a:solidFill>
+          <a:prstDash val="solid"/>
+          <a:round/>
         </a:ln>
         <a:effectLst/>
         <a:sp3d/>
@@ -6164,7 +6004,7 @@
         <a:spAutoFit/>
       </a:bodyPr>
       <a:lstStyle>
-        <a:defPPr marL="0" marR="0" indent="0" algn="ctr" defTabSz="825500" rtl="0" fontAlgn="auto" latinLnBrk="0" hangingPunct="0">
+        <a:defPPr marL="0" marR="0" indent="0" algn="ctr" defTabSz="2438337" rtl="0" fontAlgn="auto" latinLnBrk="0" hangingPunct="0">
           <a:lnSpc>
             <a:spcPct val="100000"/>
           </a:lnSpc>
@@ -6179,19 +6019,19 @@
           <a:buFontTx/>
           <a:buNone/>
           <a:tabLst/>
-          <a:defRPr b="0" baseline="0" cap="none" i="0" spc="0" strike="noStrike" sz="3200" u="none" kumimoji="0" normalizeH="0">
+          <a:defRPr b="0" baseline="0" cap="none" i="0" spc="0" strike="noStrike" sz="2400" u="none" kumimoji="0" normalizeH="0">
             <a:ln>
               <a:noFill/>
             </a:ln>
             <a:solidFill>
-              <a:srgbClr val="FFFFFF"/>
+              <a:srgbClr val="5E5E5E"/>
             </a:solidFill>
             <a:effectLst/>
             <a:uFillTx/>
-            <a:latin typeface="Helvetica Neue Medium"/>
-            <a:ea typeface="Helvetica Neue Medium"/>
-            <a:cs typeface="Helvetica Neue Medium"/>
-            <a:sym typeface="Helvetica Neue Medium"/>
+            <a:latin typeface="+mj-lt"/>
+            <a:ea typeface="+mj-ea"/>
+            <a:cs typeface="+mj-cs"/>
+            <a:sym typeface="Helvetica Neue"/>
           </a:defRPr>
         </a:defPPr>
         <a:lvl1pPr marL="0" marR="0" indent="0" algn="l" defTabSz="914400" rtl="0" fontAlgn="auto" latinLnBrk="1" hangingPunct="0">
@@ -6441,10 +6281,10 @@
         <a:noFill/>
         <a:ln w="25400" cap="flat">
           <a:solidFill>
-            <a:srgbClr val="000000"/>
+            <a:schemeClr val="accent1"/>
           </a:solidFill>
           <a:prstDash val="solid"/>
-          <a:miter lim="400000"/>
+          <a:round/>
         </a:ln>
         <a:effectLst/>
         <a:sp3d/>
@@ -6735,7 +6575,7 @@
         <a:spAutoFit/>
       </a:bodyPr>
       <a:lstStyle>
-        <a:defPPr marL="0" marR="0" indent="0" algn="ctr" defTabSz="2438338" rtl="0" fontAlgn="auto" latinLnBrk="0" hangingPunct="0">
+        <a:defPPr marL="0" marR="0" indent="0" algn="ctr" defTabSz="2438337" rtl="0" fontAlgn="auto" latinLnBrk="0" hangingPunct="0">
           <a:lnSpc>
             <a:spcPct val="100000"/>
           </a:lnSpc>
@@ -6759,9 +6599,9 @@
             </a:solidFill>
             <a:effectLst/>
             <a:uFillTx/>
-            <a:latin typeface="+mn-lt"/>
-            <a:ea typeface="+mn-ea"/>
-            <a:cs typeface="+mn-cs"/>
+            <a:latin typeface="+mj-lt"/>
+            <a:ea typeface="+mj-ea"/>
+            <a:cs typeface="+mj-cs"/>
             <a:sym typeface="Helvetica Neue"/>
           </a:defRPr>
         </a:defPPr>
@@ -7022,10 +6862,10 @@
         <a:srgbClr val="FFFFFF"/>
       </a:lt1>
       <a:dk2>
-        <a:srgbClr val="5E5E5E"/>
+        <a:srgbClr val="A7A7A7"/>
       </a:dk2>
       <a:lt2>
-        <a:srgbClr val="D5D5D5"/>
+        <a:srgbClr val="535353"/>
       </a:lt2>
       <a:accent1>
         <a:srgbClr val="00A2FF"/>
@@ -7059,9 +6899,9 @@
         <a:cs typeface="Helvetica Neue"/>
       </a:majorFont>
       <a:minorFont>
-        <a:latin typeface="Helvetica Neue"/>
-        <a:ea typeface="Helvetica Neue"/>
-        <a:cs typeface="Helvetica Neue"/>
+        <a:latin typeface="Helvetica"/>
+        <a:ea typeface="Helvetica"/>
+        <a:cs typeface="Helvetica"/>
       </a:minorFont>
     </a:fontScheme>
     <a:fmtScheme name="33_DynamicLight">
@@ -7202,11 +7042,14 @@
     <a:spDef>
       <a:spPr>
         <a:solidFill>
-          <a:srgbClr val="000000"/>
+          <a:srgbClr val="005E00"/>
         </a:solidFill>
-        <a:ln w="12700" cap="flat">
-          <a:noFill/>
-          <a:miter lim="400000"/>
+        <a:ln w="25400" cap="flat">
+          <a:solidFill>
+            <a:schemeClr val="accent1"/>
+          </a:solidFill>
+          <a:prstDash val="solid"/>
+          <a:round/>
         </a:ln>
         <a:effectLst/>
         <a:sp3d/>
@@ -7215,7 +7058,7 @@
         <a:spAutoFit/>
       </a:bodyPr>
       <a:lstStyle>
-        <a:defPPr marL="0" marR="0" indent="0" algn="ctr" defTabSz="825500" rtl="0" fontAlgn="auto" latinLnBrk="0" hangingPunct="0">
+        <a:defPPr marL="0" marR="0" indent="0" algn="ctr" defTabSz="2438337" rtl="0" fontAlgn="auto" latinLnBrk="0" hangingPunct="0">
           <a:lnSpc>
             <a:spcPct val="100000"/>
           </a:lnSpc>
@@ -7230,19 +7073,19 @@
           <a:buFontTx/>
           <a:buNone/>
           <a:tabLst/>
-          <a:defRPr b="0" baseline="0" cap="none" i="0" spc="0" strike="noStrike" sz="3200" u="none" kumimoji="0" normalizeH="0">
+          <a:defRPr b="0" baseline="0" cap="none" i="0" spc="0" strike="noStrike" sz="2400" u="none" kumimoji="0" normalizeH="0">
             <a:ln>
               <a:noFill/>
             </a:ln>
             <a:solidFill>
-              <a:srgbClr val="FFFFFF"/>
+              <a:srgbClr val="5E5E5E"/>
             </a:solidFill>
             <a:effectLst/>
             <a:uFillTx/>
-            <a:latin typeface="Helvetica Neue Medium"/>
-            <a:ea typeface="Helvetica Neue Medium"/>
-            <a:cs typeface="Helvetica Neue Medium"/>
-            <a:sym typeface="Helvetica Neue Medium"/>
+            <a:latin typeface="+mj-lt"/>
+            <a:ea typeface="+mj-ea"/>
+            <a:cs typeface="+mj-cs"/>
+            <a:sym typeface="Helvetica Neue"/>
           </a:defRPr>
         </a:defPPr>
         <a:lvl1pPr marL="0" marR="0" indent="0" algn="l" defTabSz="914400" rtl="0" fontAlgn="auto" latinLnBrk="1" hangingPunct="0">
@@ -7492,10 +7335,10 @@
         <a:noFill/>
         <a:ln w="25400" cap="flat">
           <a:solidFill>
-            <a:srgbClr val="000000"/>
+            <a:schemeClr val="accent1"/>
           </a:solidFill>
           <a:prstDash val="solid"/>
-          <a:miter lim="400000"/>
+          <a:round/>
         </a:ln>
         <a:effectLst/>
         <a:sp3d/>
@@ -7786,7 +7629,7 @@
         <a:spAutoFit/>
       </a:bodyPr>
       <a:lstStyle>
-        <a:defPPr marL="0" marR="0" indent="0" algn="ctr" defTabSz="2438338" rtl="0" fontAlgn="auto" latinLnBrk="0" hangingPunct="0">
+        <a:defPPr marL="0" marR="0" indent="0" algn="ctr" defTabSz="2438337" rtl="0" fontAlgn="auto" latinLnBrk="0" hangingPunct="0">
           <a:lnSpc>
             <a:spcPct val="100000"/>
           </a:lnSpc>
@@ -7810,9 +7653,9 @@
             </a:solidFill>
             <a:effectLst/>
             <a:uFillTx/>
-            <a:latin typeface="+mn-lt"/>
-            <a:ea typeface="+mn-ea"/>
-            <a:cs typeface="+mn-cs"/>
+            <a:latin typeface="+mj-lt"/>
+            <a:ea typeface="+mj-ea"/>
+            <a:cs typeface="+mj-cs"/>
             <a:sym typeface="Helvetica Neue"/>
           </a:defRPr>
         </a:defPPr>
